--- a/최종발표/아키텍처 예시.pptx
+++ b/최종발표/아키텍처 예시.pptx
@@ -1,12 +1,14 @@
 
 <file path=ppt/presentation.xml><?xml version="1.0" encoding="utf-8"?>
-<p:presentation xmlns:a="http://schemas.openxmlformats.org/drawingml/2006/main" xmlns:r="http://schemas.openxmlformats.org/officeDocument/2006/relationships" xmlns:p="http://schemas.openxmlformats.org/presentationml/2006/main" saveSubsetFonts="1">
+<p:presentation xmlns:a="http://schemas.openxmlformats.org/drawingml/2006/main" xmlns:r="http://schemas.openxmlformats.org/officeDocument/2006/relationships" xmlns:p="http://schemas.openxmlformats.org/presentationml/2006/main" xmlns:p14="http://schemas.microsoft.com/office/powerpoint/2010/main" saveSubsetFonts="1">
   <p:sldMasterIdLst>
-    <p:sldMasterId id="2147483648" r:id="rId1"/>
+    <p:sldMasterId id="2147483662" r:id="rId13"/>
   </p:sldMasterIdLst>
   <p:sldIdLst>
-    <p:sldId id="256" r:id="rId2"/>
-    <p:sldId id="257" r:id="rId3"/>
+    <p:sldId id="256" r:id="rId15"/>
+    <p:sldId id="257" r:id="rId16"/>
+    <p:sldId id="258" r:id="rId17"/>
+    <p:sldId id="259" r:id="rId18"/>
   </p:sldIdLst>
   <p:sldSz cx="12192000" cy="6858000"/>
   <p:notesSz cx="6858000" cy="9144000"/>
@@ -3306,6 +3308,940 @@
 </file>
 
 <file path=ppt/slides/slide1.xml><?xml version="1.0" encoding="utf-8"?>
+<p:sld xmlns:a="http://schemas.openxmlformats.org/drawingml/2006/main" xmlns:r="http://schemas.openxmlformats.org/officeDocument/2006/relationships" xmlns:p="http://schemas.openxmlformats.org/presentationml/2006/main" xmlns:p14="http://schemas.microsoft.com/office/powerpoint/2010/main">
+  <p:cSld>
+    <p:spTree>
+      <p:nvGrpSpPr>
+        <p:cNvPr id="1" name=""/>
+        <p:cNvGrpSpPr/>
+        <p:nvPr/>
+      </p:nvGrpSpPr>
+      <p:grpSpPr>
+        <a:xfrm>
+          <a:off x="0" y="0"/>
+          <a:ext cx="0" cy="0"/>
+          <a:chOff x="0" y="0"/>
+          <a:chExt cx="0" cy="0"/>
+        </a:xfrm>
+      </p:grpSpPr>
+      <p:sp>
+        <p:nvSpPr>
+          <p:cNvPr id="4" name="직사각형 3">
+            <a:extLst>
+              <a:ext uri="{FF2B5EF4-FFF2-40B4-BE49-F238E27FC236}">
+                <a16:creationId xmlns:a16="http://schemas.microsoft.com/office/drawing/2014/main" id="{119D40DD-2F5B-4FEE-A2F0-59FCF1A6D84E}"/>
+              </a:ext>
+            </a:extLst>
+          </p:cNvPr>
+          <p:cNvSpPr/>
+          <p:nvPr/>
+        </p:nvSpPr>
+        <p:spPr>
+          <a:xfrm>
+            <a:off x="2341245" y="471170"/>
+            <a:ext cx="4696460" cy="5334000"/>
+          </a:xfrm>
+          <a:prstGeom prst="rect">
+            <a:avLst/>
+          </a:prstGeom>
+          <a:noFill/>
+        </p:spPr>
+        <p:style>
+          <a:lnRef idx="2">
+            <a:schemeClr val="accent1">
+              <a:shade val="50000"/>
+            </a:schemeClr>
+          </a:lnRef>
+          <a:fillRef idx="1">
+            <a:schemeClr val="accent1"/>
+          </a:fillRef>
+          <a:effectRef idx="0">
+            <a:schemeClr val="accent1"/>
+          </a:effectRef>
+          <a:fontRef idx="minor">
+            <a:schemeClr val="lt1"/>
+          </a:fontRef>
+        </p:style>
+        <p:txBody>
+          <a:bodyPr rtlCol="0" anchor="ctr"/>
+          <a:lstStyle/>
+          <a:p>
+            <a:pPr algn="ctr"/>
+            <a:endParaRPr lang="ko-KR" altLang="en-US"/>
+          </a:p>
+        </p:txBody>
+      </p:sp>
+      <p:sp>
+        <p:nvSpPr>
+          <p:cNvPr id="5" name="TextBox 4">
+            <a:extLst>
+              <a:ext uri="{FF2B5EF4-FFF2-40B4-BE49-F238E27FC236}">
+                <a16:creationId xmlns:a16="http://schemas.microsoft.com/office/drawing/2014/main" id="{49B6E06A-5916-4A46-9CEF-F7F8A9283CE7}"/>
+              </a:ext>
+            </a:extLst>
+          </p:cNvPr>
+          <p:cNvSpPr txBox="1"/>
+          <p:nvPr/>
+        </p:nvSpPr>
+        <p:spPr>
+          <a:xfrm>
+            <a:off x="4071620" y="683895"/>
+            <a:ext cx="1236345" cy="369570"/>
+          </a:xfrm>
+          <a:prstGeom prst="rect">
+            <a:avLst/>
+          </a:prstGeom>
+          <a:noFill/>
+        </p:spPr>
+        <p:txBody>
+          <a:bodyPr wrap="none" rtlCol="0">
+            <a:spAutoFit/>
+          </a:bodyPr>
+          <a:lstStyle/>
+          <a:p>
+            <a:r>
+              <a:rPr lang="en-US" altLang="ko-KR" dirty="0"/>
+              <a:t>Flask </a:t>
+            </a:r>
+            <a:r>
+              <a:rPr lang="ko-KR" altLang="en-US" dirty="0"/>
+              <a:t>서버</a:t>
+            </a:r>
+          </a:p>
+        </p:txBody>
+      </p:sp>
+      <p:sp>
+        <p:nvSpPr>
+          <p:cNvPr id="6" name="직사각형 5">
+            <a:extLst>
+              <a:ext uri="{FF2B5EF4-FFF2-40B4-BE49-F238E27FC236}">
+                <a16:creationId xmlns:a16="http://schemas.microsoft.com/office/drawing/2014/main" id="{E2BF5056-0603-497D-AD75-19148CB456B5}"/>
+              </a:ext>
+            </a:extLst>
+          </p:cNvPr>
+          <p:cNvSpPr/>
+          <p:nvPr/>
+        </p:nvSpPr>
+        <p:spPr>
+          <a:xfrm>
+            <a:off x="8215630" y="946785"/>
+            <a:ext cx="1635125" cy="2988310"/>
+          </a:xfrm>
+          <a:prstGeom prst="rect">
+            <a:avLst/>
+          </a:prstGeom>
+          <a:noFill/>
+        </p:spPr>
+        <p:style>
+          <a:lnRef idx="2">
+            <a:schemeClr val="accent1">
+              <a:shade val="50000"/>
+            </a:schemeClr>
+          </a:lnRef>
+          <a:fillRef idx="1">
+            <a:schemeClr val="accent1"/>
+          </a:fillRef>
+          <a:effectRef idx="0">
+            <a:schemeClr val="accent1"/>
+          </a:effectRef>
+          <a:fontRef idx="minor">
+            <a:schemeClr val="lt1"/>
+          </a:fontRef>
+        </p:style>
+        <p:txBody>
+          <a:bodyPr rtlCol="0" anchor="ctr"/>
+          <a:lstStyle/>
+          <a:p>
+            <a:pPr algn="ctr"/>
+            <a:endParaRPr lang="ko-KR" altLang="en-US"/>
+          </a:p>
+        </p:txBody>
+      </p:sp>
+      <p:sp>
+        <p:nvSpPr>
+          <p:cNvPr id="7" name="TextBox 6">
+            <a:extLst>
+              <a:ext uri="{FF2B5EF4-FFF2-40B4-BE49-F238E27FC236}">
+                <a16:creationId xmlns:a16="http://schemas.microsoft.com/office/drawing/2014/main" id="{3E925700-2255-489E-8846-0BDB06EAD28C}"/>
+              </a:ext>
+            </a:extLst>
+          </p:cNvPr>
+          <p:cNvSpPr txBox="1"/>
+          <p:nvPr/>
+        </p:nvSpPr>
+        <p:spPr>
+          <a:xfrm>
+            <a:off x="8070850" y="471170"/>
+            <a:ext cx="1924685" cy="369570"/>
+          </a:xfrm>
+          <a:prstGeom prst="rect">
+            <a:avLst/>
+          </a:prstGeom>
+          <a:noFill/>
+        </p:spPr>
+        <p:txBody>
+          <a:bodyPr wrap="none" rtlCol="0">
+            <a:spAutoFit/>
+          </a:bodyPr>
+          <a:lstStyle/>
+          <a:p>
+            <a:r>
+              <a:rPr lang="en-US" altLang="ko-KR" dirty="0" err="1"/>
+              <a:t>Kakao</a:t>
+            </a:r>
+            <a:r>
+              <a:rPr lang="en-US" altLang="ko-KR" dirty="0"/>
+              <a:t> </a:t>
+            </a:r>
+            <a:r>
+              <a:rPr lang="en-US" altLang="ko-KR" dirty="0" err="1"/>
+              <a:t>api</a:t>
+            </a:r>
+            <a:r>
+              <a:rPr lang="en-US" altLang="ko-KR" dirty="0"/>
+              <a:t> server</a:t>
+            </a:r>
+            <a:endParaRPr lang="ko-KR" altLang="en-US" dirty="0"/>
+          </a:p>
+        </p:txBody>
+      </p:sp>
+      <p:cxnSp>
+        <p:nvCxnSpPr>
+          <p:cNvPr id="9" name="직선 화살표 연결선 8">
+            <a:extLst>
+              <a:ext uri="{FF2B5EF4-FFF2-40B4-BE49-F238E27FC236}">
+                <a16:creationId xmlns:a16="http://schemas.microsoft.com/office/drawing/2014/main" id="{E2BF4836-3DA6-4738-8795-40BA5491183C}"/>
+              </a:ext>
+            </a:extLst>
+          </p:cNvPr>
+          <p:cNvCxnSpPr/>
+          <p:nvPr/>
+        </p:nvCxnSpPr>
+        <p:spPr>
+          <a:xfrm>
+            <a:off x="7051675" y="1944370"/>
+            <a:ext cx="1163955" cy="0"/>
+          </a:xfrm>
+          <a:prstGeom prst="straightConnector1">
+            <a:avLst/>
+          </a:prstGeom>
+          <a:ln>
+            <a:tailEnd type="triangle"/>
+          </a:ln>
+        </p:spPr>
+        <p:style>
+          <a:lnRef idx="1">
+            <a:schemeClr val="accent1"/>
+          </a:lnRef>
+          <a:fillRef idx="0">
+            <a:schemeClr val="accent1"/>
+          </a:fillRef>
+          <a:effectRef idx="0">
+            <a:schemeClr val="accent1"/>
+          </a:effectRef>
+          <a:fontRef idx="minor">
+            <a:schemeClr val="tx1"/>
+          </a:fontRef>
+        </p:style>
+      </p:cxnSp>
+      <p:cxnSp>
+        <p:nvCxnSpPr>
+          <p:cNvPr id="10" name="직선 화살표 연결선 9">
+            <a:extLst>
+              <a:ext uri="{FF2B5EF4-FFF2-40B4-BE49-F238E27FC236}">
+                <a16:creationId xmlns:a16="http://schemas.microsoft.com/office/drawing/2014/main" id="{9823FA32-1708-45B1-9ECB-7BBB20863C93}"/>
+              </a:ext>
+            </a:extLst>
+          </p:cNvPr>
+          <p:cNvCxnSpPr/>
+          <p:nvPr/>
+        </p:nvCxnSpPr>
+        <p:spPr>
+          <a:xfrm>
+            <a:off x="7051675" y="3537585"/>
+            <a:ext cx="1163955" cy="0"/>
+          </a:xfrm>
+          <a:prstGeom prst="straightConnector1">
+            <a:avLst/>
+          </a:prstGeom>
+          <a:ln>
+            <a:headEnd type="triangle"/>
+            <a:tailEnd type="none"/>
+          </a:ln>
+        </p:spPr>
+        <p:style>
+          <a:lnRef idx="1">
+            <a:schemeClr val="accent1"/>
+          </a:lnRef>
+          <a:fillRef idx="0">
+            <a:schemeClr val="accent1"/>
+          </a:fillRef>
+          <a:effectRef idx="0">
+            <a:schemeClr val="accent1"/>
+          </a:effectRef>
+          <a:fontRef idx="minor">
+            <a:schemeClr val="tx1"/>
+          </a:fontRef>
+        </p:style>
+      </p:cxnSp>
+      <p:sp>
+        <p:nvSpPr>
+          <p:cNvPr id="12" name="직사각형 11">
+            <a:extLst>
+              <a:ext uri="{FF2B5EF4-FFF2-40B4-BE49-F238E27FC236}">
+                <a16:creationId xmlns:a16="http://schemas.microsoft.com/office/drawing/2014/main" id="{02B5A556-AE9B-4CD0-A21E-7A8C0F9A830C}"/>
+              </a:ext>
+            </a:extLst>
+          </p:cNvPr>
+          <p:cNvSpPr/>
+          <p:nvPr/>
+        </p:nvSpPr>
+        <p:spPr>
+          <a:xfrm>
+            <a:off x="247650" y="471170"/>
+            <a:ext cx="1524000" cy="5334000"/>
+          </a:xfrm>
+          <a:prstGeom prst="rect">
+            <a:avLst/>
+          </a:prstGeom>
+          <a:noFill/>
+        </p:spPr>
+        <p:style>
+          <a:lnRef idx="2">
+            <a:schemeClr val="accent1">
+              <a:shade val="50000"/>
+            </a:schemeClr>
+          </a:lnRef>
+          <a:fillRef idx="1">
+            <a:schemeClr val="accent1"/>
+          </a:fillRef>
+          <a:effectRef idx="0">
+            <a:schemeClr val="accent1"/>
+          </a:effectRef>
+          <a:fontRef idx="minor">
+            <a:schemeClr val="lt1"/>
+          </a:fontRef>
+        </p:style>
+        <p:txBody>
+          <a:bodyPr rtlCol="0" anchor="ctr"/>
+          <a:lstStyle/>
+          <a:p>
+            <a:pPr algn="ctr"/>
+            <a:endParaRPr lang="ko-KR" altLang="en-US"/>
+          </a:p>
+        </p:txBody>
+      </p:sp>
+      <p:sp>
+        <p:nvSpPr>
+          <p:cNvPr id="13" name="TextBox 12">
+            <a:extLst>
+              <a:ext uri="{FF2B5EF4-FFF2-40B4-BE49-F238E27FC236}">
+                <a16:creationId xmlns:a16="http://schemas.microsoft.com/office/drawing/2014/main" id="{877E6395-D530-4316-96B8-5649B6B42FD2}"/>
+              </a:ext>
+            </a:extLst>
+          </p:cNvPr>
+          <p:cNvSpPr txBox="1"/>
+          <p:nvPr/>
+        </p:nvSpPr>
+        <p:spPr>
+          <a:xfrm>
+            <a:off x="575945" y="683895"/>
+            <a:ext cx="742315" cy="369570"/>
+          </a:xfrm>
+          <a:prstGeom prst="rect">
+            <a:avLst/>
+          </a:prstGeom>
+          <a:noFill/>
+        </p:spPr>
+        <p:txBody>
+          <a:bodyPr wrap="none" rtlCol="0">
+            <a:spAutoFit/>
+          </a:bodyPr>
+          <a:lstStyle/>
+          <a:p>
+            <a:r>
+              <a:rPr lang="en-US" altLang="ko-KR" dirty="0"/>
+              <a:t>client</a:t>
+            </a:r>
+            <a:endParaRPr lang="ko-KR" altLang="en-US" dirty="0"/>
+          </a:p>
+        </p:txBody>
+      </p:sp>
+      <p:cxnSp>
+        <p:nvCxnSpPr>
+          <p:cNvPr id="14" name="직선 화살표 연결선 13">
+            <a:extLst>
+              <a:ext uri="{FF2B5EF4-FFF2-40B4-BE49-F238E27FC236}">
+                <a16:creationId xmlns:a16="http://schemas.microsoft.com/office/drawing/2014/main" id="{63FDF2E1-8A95-4AC8-A60A-D93C8586F356}"/>
+              </a:ext>
+            </a:extLst>
+          </p:cNvPr>
+          <p:cNvCxnSpPr>
+            <a:cxnSpLocks/>
+          </p:cNvCxnSpPr>
+          <p:nvPr/>
+        </p:nvCxnSpPr>
+        <p:spPr>
+          <a:xfrm>
+            <a:off x="1771650" y="2341245"/>
+            <a:ext cx="569595" cy="0"/>
+          </a:xfrm>
+          <a:prstGeom prst="straightConnector1">
+            <a:avLst/>
+          </a:prstGeom>
+          <a:ln>
+            <a:tailEnd type="triangle"/>
+          </a:ln>
+        </p:spPr>
+        <p:style>
+          <a:lnRef idx="1">
+            <a:schemeClr val="accent1"/>
+          </a:lnRef>
+          <a:fillRef idx="0">
+            <a:schemeClr val="accent1"/>
+          </a:fillRef>
+          <a:effectRef idx="0">
+            <a:schemeClr val="accent1"/>
+          </a:effectRef>
+          <a:fontRef idx="minor">
+            <a:schemeClr val="tx1"/>
+          </a:fontRef>
+        </p:style>
+      </p:cxnSp>
+      <p:cxnSp>
+        <p:nvCxnSpPr>
+          <p:cNvPr id="15" name="직선 화살표 연결선 14">
+            <a:extLst>
+              <a:ext uri="{FF2B5EF4-FFF2-40B4-BE49-F238E27FC236}">
+                <a16:creationId xmlns:a16="http://schemas.microsoft.com/office/drawing/2014/main" id="{71AA29B6-5C4B-4689-A865-C11C2E0C9963}"/>
+              </a:ext>
+            </a:extLst>
+          </p:cNvPr>
+          <p:cNvCxnSpPr>
+            <a:cxnSpLocks/>
+          </p:cNvCxnSpPr>
+          <p:nvPr/>
+        </p:nvCxnSpPr>
+        <p:spPr>
+          <a:xfrm>
+            <a:off x="1771650" y="3934460"/>
+            <a:ext cx="569595" cy="0"/>
+          </a:xfrm>
+          <a:prstGeom prst="straightConnector1">
+            <a:avLst/>
+          </a:prstGeom>
+          <a:ln>
+            <a:headEnd type="triangle"/>
+            <a:tailEnd type="none"/>
+          </a:ln>
+        </p:spPr>
+        <p:style>
+          <a:lnRef idx="1">
+            <a:schemeClr val="accent1"/>
+          </a:lnRef>
+          <a:fillRef idx="0">
+            <a:schemeClr val="accent1"/>
+          </a:fillRef>
+          <a:effectRef idx="0">
+            <a:schemeClr val="accent1"/>
+          </a:effectRef>
+          <a:fontRef idx="minor">
+            <a:schemeClr val="tx1"/>
+          </a:fontRef>
+        </p:style>
+      </p:cxnSp>
+      <p:sp>
+        <p:nvSpPr>
+          <p:cNvPr id="20" name="직사각형 19">
+            <a:extLst>
+              <a:ext uri="{FF2B5EF4-FFF2-40B4-BE49-F238E27FC236}">
+                <a16:creationId xmlns:a16="http://schemas.microsoft.com/office/drawing/2014/main" id="{26790E0D-C935-475B-97D1-F2A8F44500CD}"/>
+              </a:ext>
+            </a:extLst>
+          </p:cNvPr>
+          <p:cNvSpPr/>
+          <p:nvPr/>
+        </p:nvSpPr>
+        <p:spPr>
+          <a:xfrm>
+            <a:off x="8215630" y="4476115"/>
+            <a:ext cx="1635125" cy="1435735"/>
+          </a:xfrm>
+          <a:prstGeom prst="rect">
+            <a:avLst/>
+          </a:prstGeom>
+          <a:noFill/>
+        </p:spPr>
+        <p:style>
+          <a:lnRef idx="2">
+            <a:schemeClr val="accent1">
+              <a:shade val="50000"/>
+            </a:schemeClr>
+          </a:lnRef>
+          <a:fillRef idx="1">
+            <a:schemeClr val="accent1"/>
+          </a:fillRef>
+          <a:effectRef idx="0">
+            <a:schemeClr val="accent1"/>
+          </a:effectRef>
+          <a:fontRef idx="minor">
+            <a:schemeClr val="lt1"/>
+          </a:fontRef>
+        </p:style>
+        <p:txBody>
+          <a:bodyPr rtlCol="0" anchor="ctr"/>
+          <a:lstStyle/>
+          <a:p>
+            <a:pPr algn="ctr"/>
+            <a:endParaRPr lang="ko-KR" altLang="en-US"/>
+          </a:p>
+        </p:txBody>
+      </p:sp>
+      <p:sp>
+        <p:nvSpPr>
+          <p:cNvPr id="21" name="TextBox 20">
+            <a:extLst>
+              <a:ext uri="{FF2B5EF4-FFF2-40B4-BE49-F238E27FC236}">
+                <a16:creationId xmlns:a16="http://schemas.microsoft.com/office/drawing/2014/main" id="{1CCA18AE-A74D-48DB-8F1D-5D528B525DFB}"/>
+              </a:ext>
+            </a:extLst>
+          </p:cNvPr>
+          <p:cNvSpPr txBox="1"/>
+          <p:nvPr/>
+        </p:nvSpPr>
+        <p:spPr>
+          <a:xfrm>
+            <a:off x="8634730" y="4112260"/>
+            <a:ext cx="796925" cy="369570"/>
+          </a:xfrm>
+          <a:prstGeom prst="rect">
+            <a:avLst/>
+          </a:prstGeom>
+          <a:noFill/>
+        </p:spPr>
+        <p:txBody>
+          <a:bodyPr wrap="none" rtlCol="0">
+            <a:spAutoFit/>
+          </a:bodyPr>
+          <a:lstStyle/>
+          <a:p>
+            <a:r>
+              <a:rPr lang="en-US" altLang="ko-KR" dirty="0" err="1"/>
+              <a:t>mysql</a:t>
+            </a:r>
+            <a:endParaRPr lang="ko-KR" altLang="en-US" dirty="0"/>
+          </a:p>
+        </p:txBody>
+      </p:sp>
+      <p:sp>
+        <p:nvSpPr>
+          <p:cNvPr id="22" name="직사각형 21">
+            <a:extLst>
+              <a:ext uri="{FF2B5EF4-FFF2-40B4-BE49-F238E27FC236}">
+                <a16:creationId xmlns:a16="http://schemas.microsoft.com/office/drawing/2014/main" id="{829A9830-4691-4EA2-BDB7-BFDC77BC0410}"/>
+              </a:ext>
+            </a:extLst>
+          </p:cNvPr>
+          <p:cNvSpPr/>
+          <p:nvPr/>
+        </p:nvSpPr>
+        <p:spPr>
+          <a:xfrm>
+            <a:off x="10643235" y="1934845"/>
+            <a:ext cx="1635125" cy="2988310"/>
+          </a:xfrm>
+          <a:prstGeom prst="rect">
+            <a:avLst/>
+          </a:prstGeom>
+          <a:noFill/>
+        </p:spPr>
+        <p:style>
+          <a:lnRef idx="2">
+            <a:schemeClr val="accent1">
+              <a:shade val="50000"/>
+            </a:schemeClr>
+          </a:lnRef>
+          <a:fillRef idx="1">
+            <a:schemeClr val="accent1"/>
+          </a:fillRef>
+          <a:effectRef idx="0">
+            <a:schemeClr val="accent1"/>
+          </a:effectRef>
+          <a:fontRef idx="minor">
+            <a:schemeClr val="lt1"/>
+          </a:fontRef>
+        </p:style>
+        <p:txBody>
+          <a:bodyPr rtlCol="0" anchor="ctr"/>
+          <a:lstStyle/>
+          <a:p>
+            <a:pPr algn="ctr"/>
+            <a:endParaRPr lang="ko-KR" altLang="en-US"/>
+          </a:p>
+        </p:txBody>
+      </p:sp>
+      <p:sp>
+        <p:nvSpPr>
+          <p:cNvPr id="23" name="TextBox 22">
+            <a:extLst>
+              <a:ext uri="{FF2B5EF4-FFF2-40B4-BE49-F238E27FC236}">
+                <a16:creationId xmlns:a16="http://schemas.microsoft.com/office/drawing/2014/main" id="{87ED099B-83C3-4133-AE6F-ECFACECEE548}"/>
+              </a:ext>
+            </a:extLst>
+          </p:cNvPr>
+          <p:cNvSpPr txBox="1"/>
+          <p:nvPr/>
+        </p:nvSpPr>
+        <p:spPr>
+          <a:xfrm>
+            <a:off x="10498455" y="1459230"/>
+            <a:ext cx="1985645" cy="369570"/>
+          </a:xfrm>
+          <a:prstGeom prst="rect">
+            <a:avLst/>
+          </a:prstGeom>
+          <a:noFill/>
+        </p:spPr>
+        <p:txBody>
+          <a:bodyPr wrap="none" rtlCol="0">
+            <a:spAutoFit/>
+          </a:bodyPr>
+          <a:lstStyle/>
+          <a:p>
+            <a:r>
+              <a:rPr lang="ko-KR" altLang="en-US" dirty="0"/>
+              <a:t>기상청 </a:t>
+            </a:r>
+            <a:r>
+              <a:rPr lang="en-US" altLang="ko-KR" dirty="0" err="1"/>
+              <a:t>api</a:t>
+            </a:r>
+            <a:r>
+              <a:rPr lang="en-US" altLang="ko-KR" dirty="0"/>
+              <a:t> server</a:t>
+            </a:r>
+            <a:endParaRPr lang="ko-KR" altLang="en-US" dirty="0"/>
+          </a:p>
+        </p:txBody>
+      </p:sp>
+      <p:cxnSp>
+        <p:nvCxnSpPr>
+          <p:cNvPr id="24" name="직선 화살표 연결선 23">
+            <a:extLst>
+              <a:ext uri="{FF2B5EF4-FFF2-40B4-BE49-F238E27FC236}">
+                <a16:creationId xmlns:a16="http://schemas.microsoft.com/office/drawing/2014/main" id="{03E20305-A716-495A-9E73-D0CF1FA9EDB3}"/>
+              </a:ext>
+            </a:extLst>
+          </p:cNvPr>
+          <p:cNvCxnSpPr>
+            <a:cxnSpLocks/>
+          </p:cNvCxnSpPr>
+          <p:nvPr/>
+        </p:nvCxnSpPr>
+        <p:spPr>
+          <a:xfrm>
+            <a:off x="7051675" y="2096770"/>
+            <a:ext cx="3591560" cy="0"/>
+          </a:xfrm>
+          <a:prstGeom prst="straightConnector1">
+            <a:avLst/>
+          </a:prstGeom>
+          <a:ln>
+            <a:tailEnd type="triangle"/>
+          </a:ln>
+        </p:spPr>
+        <p:style>
+          <a:lnRef idx="1">
+            <a:schemeClr val="accent1"/>
+          </a:lnRef>
+          <a:fillRef idx="0">
+            <a:schemeClr val="accent1"/>
+          </a:fillRef>
+          <a:effectRef idx="0">
+            <a:schemeClr val="accent1"/>
+          </a:effectRef>
+          <a:fontRef idx="minor">
+            <a:schemeClr val="tx1"/>
+          </a:fontRef>
+        </p:style>
+      </p:cxnSp>
+      <p:cxnSp>
+        <p:nvCxnSpPr>
+          <p:cNvPr id="25" name="직선 화살표 연결선 24">
+            <a:extLst>
+              <a:ext uri="{FF2B5EF4-FFF2-40B4-BE49-F238E27FC236}">
+                <a16:creationId xmlns:a16="http://schemas.microsoft.com/office/drawing/2014/main" id="{E925BEDC-91CC-4344-B10B-74DF9690F371}"/>
+              </a:ext>
+            </a:extLst>
+          </p:cNvPr>
+          <p:cNvCxnSpPr>
+            <a:cxnSpLocks/>
+          </p:cNvCxnSpPr>
+          <p:nvPr/>
+        </p:nvCxnSpPr>
+        <p:spPr>
+          <a:xfrm>
+            <a:off x="7051675" y="3689985"/>
+            <a:ext cx="3591560" cy="0"/>
+          </a:xfrm>
+          <a:prstGeom prst="straightConnector1">
+            <a:avLst/>
+          </a:prstGeom>
+          <a:ln>
+            <a:headEnd type="triangle"/>
+            <a:tailEnd type="none"/>
+          </a:ln>
+        </p:spPr>
+        <p:style>
+          <a:lnRef idx="1">
+            <a:schemeClr val="accent1"/>
+          </a:lnRef>
+          <a:fillRef idx="0">
+            <a:schemeClr val="accent1"/>
+          </a:fillRef>
+          <a:effectRef idx="0">
+            <a:schemeClr val="accent1"/>
+          </a:effectRef>
+          <a:fontRef idx="minor">
+            <a:schemeClr val="tx1"/>
+          </a:fontRef>
+        </p:style>
+      </p:cxnSp>
+      <p:cxnSp>
+        <p:nvCxnSpPr>
+          <p:cNvPr id="30" name="직선 화살표 연결선 29">
+            <a:extLst>
+              <a:ext uri="{FF2B5EF4-FFF2-40B4-BE49-F238E27FC236}">
+                <a16:creationId xmlns:a16="http://schemas.microsoft.com/office/drawing/2014/main" id="{7FA68B9A-3921-40E2-AF2E-75C54C310034}"/>
+              </a:ext>
+            </a:extLst>
+          </p:cNvPr>
+          <p:cNvCxnSpPr/>
+          <p:nvPr/>
+        </p:nvCxnSpPr>
+        <p:spPr>
+          <a:xfrm>
+            <a:off x="7051675" y="5088255"/>
+            <a:ext cx="1163955" cy="0"/>
+          </a:xfrm>
+          <a:prstGeom prst="straightConnector1">
+            <a:avLst/>
+          </a:prstGeom>
+          <a:ln>
+            <a:tailEnd type="triangle"/>
+          </a:ln>
+        </p:spPr>
+        <p:style>
+          <a:lnRef idx="1">
+            <a:schemeClr val="accent1"/>
+          </a:lnRef>
+          <a:fillRef idx="0">
+            <a:schemeClr val="accent1"/>
+          </a:fillRef>
+          <a:effectRef idx="0">
+            <a:schemeClr val="accent1"/>
+          </a:effectRef>
+          <a:fontRef idx="minor">
+            <a:schemeClr val="tx1"/>
+          </a:fontRef>
+        </p:style>
+      </p:cxnSp>
+      <p:cxnSp>
+        <p:nvCxnSpPr>
+          <p:cNvPr id="31" name="직선 화살표 연결선 30">
+            <a:extLst>
+              <a:ext uri="{FF2B5EF4-FFF2-40B4-BE49-F238E27FC236}">
+                <a16:creationId xmlns:a16="http://schemas.microsoft.com/office/drawing/2014/main" id="{D65A70B0-C116-42D6-8CD4-99372BBD0B15}"/>
+              </a:ext>
+            </a:extLst>
+          </p:cNvPr>
+          <p:cNvCxnSpPr/>
+          <p:nvPr/>
+        </p:nvCxnSpPr>
+        <p:spPr>
+          <a:xfrm>
+            <a:off x="7051675" y="5557520"/>
+            <a:ext cx="1163955" cy="0"/>
+          </a:xfrm>
+          <a:prstGeom prst="straightConnector1">
+            <a:avLst/>
+          </a:prstGeom>
+          <a:ln>
+            <a:headEnd type="triangle"/>
+            <a:tailEnd type="none"/>
+          </a:ln>
+        </p:spPr>
+        <p:style>
+          <a:lnRef idx="1">
+            <a:schemeClr val="accent1"/>
+          </a:lnRef>
+          <a:fillRef idx="0">
+            <a:schemeClr val="accent1"/>
+          </a:fillRef>
+          <a:effectRef idx="0">
+            <a:schemeClr val="accent1"/>
+          </a:effectRef>
+          <a:fontRef idx="minor">
+            <a:schemeClr val="tx1"/>
+          </a:fontRef>
+        </p:style>
+      </p:cxnSp>
+    </p:spTree>
+    <p:extLst>
+      <p:ext uri="{BB962C8B-B14F-4D97-AF65-F5344CB8AC3E}">
+        <p14:creationId xmlns:p14="http://schemas.microsoft.com/office/powerpoint/2010/main" val="1658446871"/>
+      </p:ext>
+    </p:extLst>
+  </p:cSld>
+  <p:clrMapOvr>
+    <a:masterClrMapping/>
+  </p:clrMapOvr>
+  <mc:AlternateContent xmlns:mc="http://schemas.openxmlformats.org/markup-compatibility/2006">
+    <mc:Choice xmlns:p14="http://schemas.microsoft.com/office/powerpoint/2010/main" Requires="p14">
+      <p:transition spd="slow" p14:dur="2000"/>
+    </mc:Choice>
+    <mc:Fallback>
+      <p:transition spd="slow"/>
+    </mc:Fallback>
+  </mc:AlternateContent>
+  <p:timing>
+    <p:tnLst>
+      <p:par>
+        <p:cTn id="1" dur="indefinite" restart="never" nodeType="tmRoot"/>
+      </p:par>
+    </p:tnLst>
+  </p:timing>
+</p:sld>
+</file>
+
+<file path=ppt/slides/slide2.xml><?xml version="1.0" encoding="utf-8"?>
+<p:sld xmlns:a="http://schemas.openxmlformats.org/drawingml/2006/main" xmlns:r="http://schemas.openxmlformats.org/officeDocument/2006/relationships" xmlns:p="http://schemas.openxmlformats.org/presentationml/2006/main" xmlns:p14="http://schemas.microsoft.com/office/powerpoint/2010/main">
+  <p:cSld>
+    <p:spTree>
+      <p:nvGrpSpPr>
+        <p:cNvPr id="1" name=""/>
+        <p:cNvGrpSpPr/>
+        <p:nvPr/>
+      </p:nvGrpSpPr>
+      <p:grpSpPr>
+        <a:xfrm>
+          <a:off x="0" y="0"/>
+          <a:ext cx="0" cy="0"/>
+          <a:chOff x="0" y="0"/>
+          <a:chExt cx="0" cy="0"/>
+        </a:xfrm>
+      </p:grpSpPr>
+      <p:sp>
+        <p:nvSpPr>
+          <p:cNvPr id="4" name="직사각형 3">
+            <a:extLst>
+              <a:ext uri="{FF2B5EF4-FFF2-40B4-BE49-F238E27FC236}">
+                <a16:creationId xmlns:a16="http://schemas.microsoft.com/office/drawing/2014/main" id="{119D40DD-2F5B-4FEE-A2F0-59FCF1A6D84E}"/>
+              </a:ext>
+            </a:extLst>
+          </p:cNvPr>
+          <p:cNvSpPr/>
+          <p:nvPr/>
+        </p:nvSpPr>
+        <p:spPr>
+          <a:xfrm>
+            <a:off x="2341245" y="471170"/>
+            <a:ext cx="4696460" cy="5334000"/>
+          </a:xfrm>
+          <a:prstGeom prst="rect">
+            <a:avLst/>
+          </a:prstGeom>
+          <a:noFill/>
+        </p:spPr>
+        <p:style>
+          <a:lnRef idx="2">
+            <a:schemeClr val="accent1">
+              <a:shade val="50000"/>
+            </a:schemeClr>
+          </a:lnRef>
+          <a:fillRef idx="1">
+            <a:schemeClr val="accent1"/>
+          </a:fillRef>
+          <a:effectRef idx="0">
+            <a:schemeClr val="accent1"/>
+          </a:effectRef>
+          <a:fontRef idx="minor">
+            <a:schemeClr val="lt1"/>
+          </a:fontRef>
+        </p:style>
+        <p:txBody>
+          <a:bodyPr rtlCol="0" anchor="ctr"/>
+          <a:lstStyle/>
+          <a:p>
+            <a:pPr algn="ctr"/>
+            <a:endParaRPr lang="ko-KR" altLang="en-US"/>
+          </a:p>
+        </p:txBody>
+      </p:sp>
+      <p:sp>
+        <p:nvSpPr>
+          <p:cNvPr id="5" name="TextBox 4">
+            <a:extLst>
+              <a:ext uri="{FF2B5EF4-FFF2-40B4-BE49-F238E27FC236}">
+                <a16:creationId xmlns:a16="http://schemas.microsoft.com/office/drawing/2014/main" id="{49B6E06A-5916-4A46-9CEF-F7F8A9283CE7}"/>
+              </a:ext>
+            </a:extLst>
+          </p:cNvPr>
+          <p:cNvSpPr txBox="1"/>
+          <p:nvPr/>
+        </p:nvSpPr>
+        <p:spPr>
+          <a:xfrm>
+            <a:off x="4071620" y="683895"/>
+            <a:ext cx="1108075" cy="369570"/>
+          </a:xfrm>
+          <a:prstGeom prst="rect">
+            <a:avLst/>
+          </a:prstGeom>
+          <a:noFill/>
+        </p:spPr>
+        <p:txBody>
+          <a:bodyPr wrap="none" rtlCol="0">
+            <a:spAutoFit/>
+          </a:bodyPr>
+          <a:lstStyle/>
+          <a:p>
+            <a:r>
+              <a:rPr lang="ko-KR" altLang="en-US" dirty="0"/>
+              <a:t>추천엔진</a:t>
+            </a:r>
+          </a:p>
+        </p:txBody>
+      </p:sp>
+    </p:spTree>
+    <p:extLst>
+      <p:ext uri="{BB962C8B-B14F-4D97-AF65-F5344CB8AC3E}">
+        <p14:creationId xmlns:p14="http://schemas.microsoft.com/office/powerpoint/2010/main" val="1862696922"/>
+      </p:ext>
+    </p:extLst>
+  </p:cSld>
+  <p:clrMapOvr>
+    <a:masterClrMapping/>
+  </p:clrMapOvr>
+  <mc:AlternateContent xmlns:mc="http://schemas.openxmlformats.org/markup-compatibility/2006">
+    <mc:Choice xmlns:p14="http://schemas.microsoft.com/office/powerpoint/2010/main" Requires="p14">
+      <p:transition spd="slow" p14:dur="2000"/>
+    </mc:Choice>
+    <mc:Fallback>
+      <p:transition spd="slow"/>
+    </mc:Fallback>
+  </mc:AlternateContent>
+  <p:timing>
+    <p:tnLst>
+      <p:par>
+        <p:cTn id="1" dur="indefinite" restart="never" nodeType="tmRoot"/>
+      </p:par>
+    </p:tnLst>
+  </p:timing>
+</p:sld>
+</file>
+
+<file path=ppt/slides/slide3.xml><?xml version="1.0" encoding="utf-8"?>
 <p:sld xmlns:a="http://schemas.openxmlformats.org/drawingml/2006/main" xmlns:r="http://schemas.openxmlformats.org/officeDocument/2006/relationships" xmlns:p="http://schemas.openxmlformats.org/presentationml/2006/main">
   <p:cSld>
     <p:spTree>
@@ -3324,24 +4260,18 @@
       </p:grpSpPr>
       <p:sp>
         <p:nvSpPr>
-          <p:cNvPr id="4" name="직사각형 3">
-            <a:extLst>
-              <a:ext uri="{FF2B5EF4-FFF2-40B4-BE49-F238E27FC236}">
-                <a16:creationId xmlns:a16="http://schemas.microsoft.com/office/drawing/2014/main" id="{119D40DD-2F5B-4FEE-A2F0-59FCF1A6D84E}"/>
-              </a:ext>
-            </a:extLst>
-          </p:cNvPr>
-          <p:cNvSpPr/>
+          <p:cNvPr id="4" name="Rect 0"/>
+          <p:cNvSpPr>
+            <a:spLocks/>
+          </p:cNvSpPr>
           <p:nvPr/>
         </p:nvSpPr>
         <p:spPr>
-          <a:xfrm>
-            <a:off x="2341416" y="471053"/>
-            <a:ext cx="4696691" cy="5334001"/>
-          </a:xfrm>
-          <a:prstGeom prst="rect">
-            <a:avLst/>
-          </a:prstGeom>
+          <a:xfrm rot="0">
+            <a:off x="2341245" y="471170"/>
+            <a:ext cx="4697095" cy="5334635"/>
+          </a:xfrm>
+          <a:prstGeom prst="rect"/>
           <a:noFill/>
         </p:spPr>
         <p:style>
@@ -3361,73 +4291,71 @@
           </a:fontRef>
         </p:style>
         <p:txBody>
-          <a:bodyPr rtlCol="0" anchor="ctr"/>
-          <a:lstStyle/>
-          <a:p>
-            <a:pPr algn="ctr"/>
-            <a:endParaRPr lang="ko-KR" altLang="en-US"/>
-          </a:p>
-        </p:txBody>
-      </p:sp>
-      <p:sp>
-        <p:nvSpPr>
-          <p:cNvPr id="5" name="TextBox 4">
-            <a:extLst>
-              <a:ext uri="{FF2B5EF4-FFF2-40B4-BE49-F238E27FC236}">
-                <a16:creationId xmlns:a16="http://schemas.microsoft.com/office/drawing/2014/main" id="{49B6E06A-5916-4A46-9CEF-F7F8A9283CE7}"/>
-              </a:ext>
-            </a:extLst>
-          </p:cNvPr>
-          <p:cNvSpPr txBox="1"/>
+          <a:bodyPr wrap="square" lIns="91440" tIns="45720" rIns="91440" bIns="45720" numCol="1" vert="horz" anchor="ctr">
+            <a:noAutofit/>
+          </a:bodyPr>
+          <a:lstStyle/>
+          <a:p>
+            <a:pPr marL="0" indent="0" algn="ctr" latinLnBrk="0">
+              <a:buFontTx/>
+              <a:buNone/>
+            </a:pPr>
+            <a:endParaRPr lang="ko-KR" altLang="en-US"/>
+          </a:p>
+        </p:txBody>
+      </p:sp>
+      <p:sp>
+        <p:nvSpPr>
+          <p:cNvPr id="5" name="Rect 0"/>
+          <p:cNvSpPr txBox="1">
+            <a:spLocks/>
+          </p:cNvSpPr>
           <p:nvPr/>
         </p:nvSpPr>
         <p:spPr>
-          <a:xfrm>
-            <a:off x="4071643" y="683614"/>
-            <a:ext cx="1236236" cy="369332"/>
-          </a:xfrm>
-          <a:prstGeom prst="rect">
-            <a:avLst/>
-          </a:prstGeom>
+          <a:xfrm rot="0">
+            <a:off x="4071620" y="683895"/>
+            <a:ext cx="1236980" cy="370205"/>
+          </a:xfrm>
+          <a:prstGeom prst="rect"/>
           <a:noFill/>
         </p:spPr>
         <p:txBody>
-          <a:bodyPr wrap="none" rtlCol="0">
+          <a:bodyPr wrap="none" lIns="91440" tIns="45720" rIns="91440" bIns="45720" numCol="1" vert="horz" anchor="t">
             <a:spAutoFit/>
           </a:bodyPr>
           <a:lstStyle/>
           <a:p>
-            <a:r>
-              <a:rPr lang="en-US" altLang="ko-KR" dirty="0"/>
+            <a:pPr marL="0" indent="0" latinLnBrk="0">
+              <a:buFontTx/>
+              <a:buNone/>
+            </a:pPr>
+            <a:r>
+              <a:rPr lang="en-US" altLang="ko-KR"/>
               <a:t>Flask </a:t>
             </a:r>
             <a:r>
-              <a:rPr lang="ko-KR" altLang="en-US" dirty="0"/>
+              <a:rPr lang="ko-KR" altLang="en-US"/>
               <a:t>서버</a:t>
             </a:r>
-          </a:p>
-        </p:txBody>
-      </p:sp>
-      <p:sp>
-        <p:nvSpPr>
-          <p:cNvPr id="6" name="직사각형 5">
-            <a:extLst>
-              <a:ext uri="{FF2B5EF4-FFF2-40B4-BE49-F238E27FC236}">
-                <a16:creationId xmlns:a16="http://schemas.microsoft.com/office/drawing/2014/main" id="{E2BF5056-0603-497D-AD75-19148CB456B5}"/>
-              </a:ext>
-            </a:extLst>
-          </p:cNvPr>
-          <p:cNvSpPr/>
+            <a:endParaRPr lang="ko-KR" altLang="en-US"/>
+          </a:p>
+        </p:txBody>
+      </p:sp>
+      <p:sp>
+        <p:nvSpPr>
+          <p:cNvPr id="6" name="Rect 0"/>
+          <p:cNvSpPr>
+            <a:spLocks/>
+          </p:cNvSpPr>
           <p:nvPr/>
         </p:nvSpPr>
         <p:spPr>
-          <a:xfrm>
-            <a:off x="8215745" y="946664"/>
-            <a:ext cx="1634839" cy="2988027"/>
-          </a:xfrm>
-          <a:prstGeom prst="rect">
-            <a:avLst/>
-          </a:prstGeom>
+          <a:xfrm rot="0">
+            <a:off x="8215630" y="946785"/>
+            <a:ext cx="1635760" cy="2988945"/>
+          </a:xfrm>
+          <a:prstGeom prst="rect"/>
           <a:noFill/>
         </p:spPr>
         <p:style>
@@ -3447,84 +4375,68 @@
           </a:fontRef>
         </p:style>
         <p:txBody>
-          <a:bodyPr rtlCol="0" anchor="ctr"/>
-          <a:lstStyle/>
-          <a:p>
-            <a:pPr algn="ctr"/>
-            <a:endParaRPr lang="ko-KR" altLang="en-US"/>
-          </a:p>
-        </p:txBody>
-      </p:sp>
-      <p:sp>
-        <p:nvSpPr>
-          <p:cNvPr id="7" name="TextBox 6">
-            <a:extLst>
-              <a:ext uri="{FF2B5EF4-FFF2-40B4-BE49-F238E27FC236}">
-                <a16:creationId xmlns:a16="http://schemas.microsoft.com/office/drawing/2014/main" id="{3E925700-2255-489E-8846-0BDB06EAD28C}"/>
-              </a:ext>
-            </a:extLst>
-          </p:cNvPr>
-          <p:cNvSpPr txBox="1"/>
+          <a:bodyPr wrap="square" lIns="91440" tIns="45720" rIns="91440" bIns="45720" numCol="1" vert="horz" anchor="ctr">
+            <a:noAutofit/>
+          </a:bodyPr>
+          <a:lstStyle/>
+          <a:p>
+            <a:pPr marL="0" indent="0" algn="ctr" latinLnBrk="0">
+              <a:buFontTx/>
+              <a:buNone/>
+            </a:pPr>
+            <a:endParaRPr lang="ko-KR" altLang="en-US"/>
+          </a:p>
+        </p:txBody>
+      </p:sp>
+      <p:sp>
+        <p:nvSpPr>
+          <p:cNvPr id="7" name="Rect 0"/>
+          <p:cNvSpPr txBox="1">
+            <a:spLocks/>
+          </p:cNvSpPr>
           <p:nvPr/>
         </p:nvSpPr>
         <p:spPr>
-          <a:xfrm>
-            <a:off x="8070945" y="471053"/>
-            <a:ext cx="1924438" cy="369332"/>
-          </a:xfrm>
-          <a:prstGeom prst="rect">
-            <a:avLst/>
-          </a:prstGeom>
+          <a:xfrm rot="0">
+            <a:off x="8070850" y="471170"/>
+            <a:ext cx="1925320" cy="370205"/>
+          </a:xfrm>
+          <a:prstGeom prst="rect"/>
           <a:noFill/>
         </p:spPr>
         <p:txBody>
-          <a:bodyPr wrap="none" rtlCol="0">
+          <a:bodyPr wrap="none" lIns="91440" tIns="45720" rIns="91440" bIns="45720" numCol="1" vert="horz" anchor="t">
             <a:spAutoFit/>
           </a:bodyPr>
           <a:lstStyle/>
           <a:p>
-            <a:r>
-              <a:rPr lang="en-US" altLang="ko-KR" dirty="0" err="1"/>
-              <a:t>Kakao</a:t>
-            </a:r>
-            <a:r>
-              <a:rPr lang="en-US" altLang="ko-KR" dirty="0"/>
-              <a:t> </a:t>
-            </a:r>
-            <a:r>
-              <a:rPr lang="en-US" altLang="ko-KR" dirty="0" err="1"/>
-              <a:t>api</a:t>
-            </a:r>
-            <a:r>
-              <a:rPr lang="en-US" altLang="ko-KR" dirty="0"/>
-              <a:t> server</a:t>
-            </a:r>
-            <a:endParaRPr lang="ko-KR" altLang="en-US" dirty="0"/>
+            <a:pPr marL="0" indent="0" latinLnBrk="0">
+              <a:buFontTx/>
+              <a:buNone/>
+            </a:pPr>
+            <a:r>
+              <a:rPr lang="en-US" altLang="ko-KR"/>
+              <a:t>Kakao api server</a:t>
+            </a:r>
+            <a:endParaRPr lang="ko-KR" altLang="en-US"/>
           </a:p>
         </p:txBody>
       </p:sp>
       <p:cxnSp>
         <p:nvCxnSpPr>
-          <p:cNvPr id="9" name="직선 화살표 연결선 8">
-            <a:extLst>
-              <a:ext uri="{FF2B5EF4-FFF2-40B4-BE49-F238E27FC236}">
-                <a16:creationId xmlns:a16="http://schemas.microsoft.com/office/drawing/2014/main" id="{E2BF4836-3DA6-4738-8795-40BA5491183C}"/>
-              </a:ext>
-            </a:extLst>
-          </p:cNvPr>
+          <p:cNvPr id="9" name="Rect 0"/>
           <p:cNvCxnSpPr/>
           <p:nvPr/>
         </p:nvCxnSpPr>
         <p:spPr>
-          <a:xfrm>
-            <a:off x="7051967" y="1944191"/>
-            <a:ext cx="1163778" cy="0"/>
-          </a:xfrm>
-          <a:prstGeom prst="straightConnector1">
-            <a:avLst/>
-          </a:prstGeom>
-          <a:ln>
-            <a:tailEnd type="triangle"/>
+          <a:xfrm rot="0">
+            <a:off x="7051675" y="1944370"/>
+            <a:ext cx="1164590" cy="635"/>
+          </a:xfrm>
+          <a:prstGeom prst="straightConnector1"/>
+          <a:ln w="6350" cap="flat" cmpd="sng">
+            <a:prstDash/>
+            <a:tailEnd type="triangle" w="med" len="med"/>
           </a:ln>
         </p:spPr>
         <p:style>
@@ -3544,27 +4456,19 @@
       </p:cxnSp>
       <p:cxnSp>
         <p:nvCxnSpPr>
-          <p:cNvPr id="10" name="직선 화살표 연결선 9">
-            <a:extLst>
-              <a:ext uri="{FF2B5EF4-FFF2-40B4-BE49-F238E27FC236}">
-                <a16:creationId xmlns:a16="http://schemas.microsoft.com/office/drawing/2014/main" id="{9823FA32-1708-45B1-9ECB-7BBB20863C93}"/>
-              </a:ext>
-            </a:extLst>
-          </p:cNvPr>
+          <p:cNvPr id="10" name="Rect 0"/>
           <p:cNvCxnSpPr/>
           <p:nvPr/>
         </p:nvCxnSpPr>
         <p:spPr>
-          <a:xfrm>
-            <a:off x="7051967" y="3537464"/>
-            <a:ext cx="1163778" cy="0"/>
-          </a:xfrm>
-          <a:prstGeom prst="straightConnector1">
-            <a:avLst/>
-          </a:prstGeom>
-          <a:ln>
-            <a:headEnd type="triangle"/>
-            <a:tailEnd type="none"/>
+          <a:xfrm rot="0">
+            <a:off x="7051675" y="3537585"/>
+            <a:ext cx="1164590" cy="635"/>
+          </a:xfrm>
+          <a:prstGeom prst="straightConnector1"/>
+          <a:ln w="6350" cap="flat" cmpd="sng">
+            <a:prstDash/>
+            <a:headEnd type="triangle" w="med" len="med"/>
           </a:ln>
         </p:spPr>
         <p:style>
@@ -3584,24 +4488,18 @@
       </p:cxnSp>
       <p:sp>
         <p:nvSpPr>
-          <p:cNvPr id="12" name="직사각형 11">
-            <a:extLst>
-              <a:ext uri="{FF2B5EF4-FFF2-40B4-BE49-F238E27FC236}">
-                <a16:creationId xmlns:a16="http://schemas.microsoft.com/office/drawing/2014/main" id="{02B5A556-AE9B-4CD0-A21E-7A8C0F9A830C}"/>
-              </a:ext>
-            </a:extLst>
-          </p:cNvPr>
-          <p:cNvSpPr/>
+          <p:cNvPr id="12" name="Rect 0"/>
+          <p:cNvSpPr>
+            <a:spLocks/>
+          </p:cNvSpPr>
           <p:nvPr/>
         </p:nvSpPr>
         <p:spPr>
-          <a:xfrm>
-            <a:off x="247650" y="471053"/>
-            <a:ext cx="1524000" cy="5334001"/>
-          </a:xfrm>
-          <a:prstGeom prst="rect">
-            <a:avLst/>
-          </a:prstGeom>
+          <a:xfrm rot="0">
+            <a:off x="247650" y="471170"/>
+            <a:ext cx="1524635" cy="3486785"/>
+          </a:xfrm>
+          <a:prstGeom prst="rect"/>
           <a:noFill/>
         </p:spPr>
         <p:style>
@@ -3621,74 +4519,68 @@
           </a:fontRef>
         </p:style>
         <p:txBody>
-          <a:bodyPr rtlCol="0" anchor="ctr"/>
-          <a:lstStyle/>
-          <a:p>
-            <a:pPr algn="ctr"/>
-            <a:endParaRPr lang="ko-KR" altLang="en-US"/>
-          </a:p>
-        </p:txBody>
-      </p:sp>
-      <p:sp>
-        <p:nvSpPr>
-          <p:cNvPr id="13" name="TextBox 12">
-            <a:extLst>
-              <a:ext uri="{FF2B5EF4-FFF2-40B4-BE49-F238E27FC236}">
-                <a16:creationId xmlns:a16="http://schemas.microsoft.com/office/drawing/2014/main" id="{877E6395-D530-4316-96B8-5649B6B42FD2}"/>
-              </a:ext>
-            </a:extLst>
-          </p:cNvPr>
-          <p:cNvSpPr txBox="1"/>
+          <a:bodyPr wrap="square" lIns="91440" tIns="45720" rIns="91440" bIns="45720" numCol="1" vert="horz" anchor="ctr">
+            <a:noAutofit/>
+          </a:bodyPr>
+          <a:lstStyle/>
+          <a:p>
+            <a:pPr marL="0" indent="0" algn="ctr" latinLnBrk="0">
+              <a:buFontTx/>
+              <a:buNone/>
+            </a:pPr>
+            <a:endParaRPr lang="ko-KR" altLang="en-US"/>
+          </a:p>
+        </p:txBody>
+      </p:sp>
+      <p:sp>
+        <p:nvSpPr>
+          <p:cNvPr id="13" name="Rect 0"/>
+          <p:cNvSpPr txBox="1">
+            <a:spLocks/>
+          </p:cNvSpPr>
           <p:nvPr/>
         </p:nvSpPr>
         <p:spPr>
-          <a:xfrm>
-            <a:off x="575638" y="683614"/>
-            <a:ext cx="742511" cy="369332"/>
-          </a:xfrm>
-          <a:prstGeom prst="rect">
-            <a:avLst/>
-          </a:prstGeom>
+          <a:xfrm rot="0">
+            <a:off x="575945" y="683895"/>
+            <a:ext cx="742950" cy="370205"/>
+          </a:xfrm>
+          <a:prstGeom prst="rect"/>
           <a:noFill/>
         </p:spPr>
         <p:txBody>
-          <a:bodyPr wrap="none" rtlCol="0">
+          <a:bodyPr wrap="none" lIns="91440" tIns="45720" rIns="91440" bIns="45720" numCol="1" vert="horz" anchor="t">
             <a:spAutoFit/>
           </a:bodyPr>
           <a:lstStyle/>
           <a:p>
-            <a:r>
-              <a:rPr lang="en-US" altLang="ko-KR" dirty="0"/>
+            <a:pPr marL="0" indent="0" latinLnBrk="0">
+              <a:buFontTx/>
+              <a:buNone/>
+            </a:pPr>
+            <a:r>
+              <a:rPr lang="en-US" altLang="ko-KR"/>
               <a:t>client</a:t>
             </a:r>
-            <a:endParaRPr lang="ko-KR" altLang="en-US" dirty="0"/>
+            <a:endParaRPr lang="ko-KR" altLang="en-US"/>
           </a:p>
         </p:txBody>
       </p:sp>
       <p:cxnSp>
         <p:nvCxnSpPr>
-          <p:cNvPr id="14" name="직선 화살표 연결선 13">
-            <a:extLst>
-              <a:ext uri="{FF2B5EF4-FFF2-40B4-BE49-F238E27FC236}">
-                <a16:creationId xmlns:a16="http://schemas.microsoft.com/office/drawing/2014/main" id="{63FDF2E1-8A95-4AC8-A60A-D93C8586F356}"/>
-              </a:ext>
-            </a:extLst>
-          </p:cNvPr>
-          <p:cNvCxnSpPr>
-            <a:cxnSpLocks/>
-          </p:cNvCxnSpPr>
+          <p:cNvPr id="14" name="Rect 0"/>
+          <p:cNvCxnSpPr/>
           <p:nvPr/>
         </p:nvCxnSpPr>
         <p:spPr>
-          <a:xfrm>
-            <a:off x="1771650" y="2341418"/>
-            <a:ext cx="569766" cy="0"/>
-          </a:xfrm>
-          <a:prstGeom prst="straightConnector1">
-            <a:avLst/>
-          </a:prstGeom>
-          <a:ln>
-            <a:tailEnd type="triangle"/>
+          <a:xfrm rot="0">
+            <a:off x="1771650" y="2341245"/>
+            <a:ext cx="570230" cy="635"/>
+          </a:xfrm>
+          <a:prstGeom prst="straightConnector1"/>
+          <a:ln w="6350" cap="flat" cmpd="sng">
+            <a:prstDash/>
+            <a:tailEnd type="triangle" w="med" len="med"/>
           </a:ln>
         </p:spPr>
         <p:style>
@@ -3708,29 +4600,19 @@
       </p:cxnSp>
       <p:cxnSp>
         <p:nvCxnSpPr>
-          <p:cNvPr id="15" name="직선 화살표 연결선 14">
-            <a:extLst>
-              <a:ext uri="{FF2B5EF4-FFF2-40B4-BE49-F238E27FC236}">
-                <a16:creationId xmlns:a16="http://schemas.microsoft.com/office/drawing/2014/main" id="{71AA29B6-5C4B-4689-A865-C11C2E0C9963}"/>
-              </a:ext>
-            </a:extLst>
-          </p:cNvPr>
-          <p:cNvCxnSpPr>
-            <a:cxnSpLocks/>
-          </p:cNvCxnSpPr>
+          <p:cNvPr id="15" name="Rect 0"/>
+          <p:cNvCxnSpPr/>
           <p:nvPr/>
         </p:nvCxnSpPr>
         <p:spPr>
-          <a:xfrm>
-            <a:off x="1771650" y="3934691"/>
-            <a:ext cx="569766" cy="0"/>
-          </a:xfrm>
-          <a:prstGeom prst="straightConnector1">
-            <a:avLst/>
-          </a:prstGeom>
-          <a:ln>
-            <a:headEnd type="triangle"/>
-            <a:tailEnd type="none"/>
+          <a:xfrm rot="0">
+            <a:off x="1762760" y="2964815"/>
+            <a:ext cx="570230" cy="635"/>
+          </a:xfrm>
+          <a:prstGeom prst="straightConnector1"/>
+          <a:ln w="6350" cap="flat" cmpd="sng">
+            <a:prstDash/>
+            <a:headEnd type="triangle" w="med" len="med"/>
           </a:ln>
         </p:spPr>
         <p:style>
@@ -3750,24 +4632,18 @@
       </p:cxnSp>
       <p:sp>
         <p:nvSpPr>
-          <p:cNvPr id="20" name="직사각형 19">
-            <a:extLst>
-              <a:ext uri="{FF2B5EF4-FFF2-40B4-BE49-F238E27FC236}">
-                <a16:creationId xmlns:a16="http://schemas.microsoft.com/office/drawing/2014/main" id="{26790E0D-C935-475B-97D1-F2A8F44500CD}"/>
-              </a:ext>
-            </a:extLst>
-          </p:cNvPr>
-          <p:cNvSpPr/>
+          <p:cNvPr id="20" name="Rect 0"/>
+          <p:cNvSpPr>
+            <a:spLocks/>
+          </p:cNvSpPr>
           <p:nvPr/>
         </p:nvSpPr>
         <p:spPr>
-          <a:xfrm>
-            <a:off x="8215745" y="4475884"/>
-            <a:ext cx="1634839" cy="1435452"/>
-          </a:xfrm>
-          <a:prstGeom prst="rect">
-            <a:avLst/>
-          </a:prstGeom>
+          <a:xfrm rot="0">
+            <a:off x="8215630" y="4476115"/>
+            <a:ext cx="1635760" cy="1436370"/>
+          </a:xfrm>
+          <a:prstGeom prst="rect"/>
           <a:noFill/>
         </p:spPr>
         <p:style>
@@ -3787,70 +4663,67 @@
           </a:fontRef>
         </p:style>
         <p:txBody>
-          <a:bodyPr rtlCol="0" anchor="ctr"/>
-          <a:lstStyle/>
-          <a:p>
-            <a:pPr algn="ctr"/>
-            <a:endParaRPr lang="ko-KR" altLang="en-US"/>
-          </a:p>
-        </p:txBody>
-      </p:sp>
-      <p:sp>
-        <p:nvSpPr>
-          <p:cNvPr id="21" name="TextBox 20">
-            <a:extLst>
-              <a:ext uri="{FF2B5EF4-FFF2-40B4-BE49-F238E27FC236}">
-                <a16:creationId xmlns:a16="http://schemas.microsoft.com/office/drawing/2014/main" id="{1CCA18AE-A74D-48DB-8F1D-5D528B525DFB}"/>
-              </a:ext>
-            </a:extLst>
-          </p:cNvPr>
-          <p:cNvSpPr txBox="1"/>
+          <a:bodyPr wrap="square" lIns="91440" tIns="45720" rIns="91440" bIns="45720" numCol="1" vert="horz" anchor="ctr">
+            <a:noAutofit/>
+          </a:bodyPr>
+          <a:lstStyle/>
+          <a:p>
+            <a:pPr marL="0" indent="0" algn="ctr" latinLnBrk="0">
+              <a:buFontTx/>
+              <a:buNone/>
+            </a:pPr>
+            <a:endParaRPr lang="ko-KR" altLang="en-US"/>
+          </a:p>
+        </p:txBody>
+      </p:sp>
+      <p:sp>
+        <p:nvSpPr>
+          <p:cNvPr id="21" name="Rect 0"/>
+          <p:cNvSpPr txBox="1">
+            <a:spLocks/>
+          </p:cNvSpPr>
           <p:nvPr/>
         </p:nvSpPr>
         <p:spPr>
-          <a:xfrm>
-            <a:off x="8634657" y="4111973"/>
-            <a:ext cx="797013" cy="369332"/>
-          </a:xfrm>
-          <a:prstGeom prst="rect">
-            <a:avLst/>
-          </a:prstGeom>
+          <a:xfrm rot="0">
+            <a:off x="8634730" y="4112260"/>
+            <a:ext cx="797560" cy="370205"/>
+          </a:xfrm>
+          <a:prstGeom prst="rect"/>
           <a:noFill/>
         </p:spPr>
         <p:txBody>
-          <a:bodyPr wrap="none" rtlCol="0">
+          <a:bodyPr wrap="none" lIns="91440" tIns="45720" rIns="91440" bIns="45720" numCol="1" vert="horz" anchor="t">
             <a:spAutoFit/>
           </a:bodyPr>
           <a:lstStyle/>
           <a:p>
-            <a:r>
-              <a:rPr lang="en-US" altLang="ko-KR" dirty="0" err="1"/>
+            <a:pPr marL="0" indent="0" latinLnBrk="0">
+              <a:buFontTx/>
+              <a:buNone/>
+            </a:pPr>
+            <a:r>
+              <a:rPr lang="en-US" altLang="ko-KR"/>
               <a:t>mysql</a:t>
             </a:r>
-            <a:endParaRPr lang="ko-KR" altLang="en-US" dirty="0"/>
-          </a:p>
-        </p:txBody>
-      </p:sp>
-      <p:sp>
-        <p:nvSpPr>
-          <p:cNvPr id="22" name="직사각형 21">
-            <a:extLst>
-              <a:ext uri="{FF2B5EF4-FFF2-40B4-BE49-F238E27FC236}">
-                <a16:creationId xmlns:a16="http://schemas.microsoft.com/office/drawing/2014/main" id="{829A9830-4691-4EA2-BDB7-BFDC77BC0410}"/>
-              </a:ext>
-            </a:extLst>
-          </p:cNvPr>
-          <p:cNvSpPr/>
+            <a:endParaRPr lang="ko-KR" altLang="en-US"/>
+          </a:p>
+        </p:txBody>
+      </p:sp>
+      <p:sp>
+        <p:nvSpPr>
+          <p:cNvPr id="22" name="Rect 0"/>
+          <p:cNvSpPr>
+            <a:spLocks/>
+          </p:cNvSpPr>
           <p:nvPr/>
         </p:nvSpPr>
         <p:spPr>
-          <a:xfrm>
-            <a:off x="10643270" y="1934986"/>
-            <a:ext cx="1634839" cy="2988027"/>
-          </a:xfrm>
-          <a:prstGeom prst="rect">
-            <a:avLst/>
-          </a:prstGeom>
+          <a:xfrm rot="0">
+            <a:off x="10643235" y="1934845"/>
+            <a:ext cx="1635760" cy="2988945"/>
+          </a:xfrm>
+          <a:prstGeom prst="rect"/>
           <a:noFill/>
         </p:spPr>
         <p:style>
@@ -3870,82 +4743,72 @@
           </a:fontRef>
         </p:style>
         <p:txBody>
-          <a:bodyPr rtlCol="0" anchor="ctr"/>
-          <a:lstStyle/>
-          <a:p>
-            <a:pPr algn="ctr"/>
-            <a:endParaRPr lang="ko-KR" altLang="en-US"/>
-          </a:p>
-        </p:txBody>
-      </p:sp>
-      <p:sp>
-        <p:nvSpPr>
-          <p:cNvPr id="23" name="TextBox 22">
-            <a:extLst>
-              <a:ext uri="{FF2B5EF4-FFF2-40B4-BE49-F238E27FC236}">
-                <a16:creationId xmlns:a16="http://schemas.microsoft.com/office/drawing/2014/main" id="{87ED099B-83C3-4133-AE6F-ECFACECEE548}"/>
-              </a:ext>
-            </a:extLst>
-          </p:cNvPr>
-          <p:cNvSpPr txBox="1"/>
+          <a:bodyPr wrap="square" lIns="91440" tIns="45720" rIns="91440" bIns="45720" numCol="1" vert="horz" anchor="ctr">
+            <a:noAutofit/>
+          </a:bodyPr>
+          <a:lstStyle/>
+          <a:p>
+            <a:pPr marL="0" indent="0" algn="ctr" latinLnBrk="0">
+              <a:buFontTx/>
+              <a:buNone/>
+            </a:pPr>
+            <a:endParaRPr lang="ko-KR" altLang="en-US"/>
+          </a:p>
+        </p:txBody>
+      </p:sp>
+      <p:sp>
+        <p:nvSpPr>
+          <p:cNvPr id="23" name="Rect 0"/>
+          <p:cNvSpPr txBox="1">
+            <a:spLocks/>
+          </p:cNvSpPr>
           <p:nvPr/>
         </p:nvSpPr>
         <p:spPr>
-          <a:xfrm>
-            <a:off x="10498470" y="1459375"/>
-            <a:ext cx="1985352" cy="369332"/>
-          </a:xfrm>
-          <a:prstGeom prst="rect">
-            <a:avLst/>
-          </a:prstGeom>
+          <a:xfrm rot="0">
+            <a:off x="10498455" y="1459230"/>
+            <a:ext cx="1986280" cy="370205"/>
+          </a:xfrm>
+          <a:prstGeom prst="rect"/>
           <a:noFill/>
         </p:spPr>
         <p:txBody>
-          <a:bodyPr wrap="none" rtlCol="0">
+          <a:bodyPr wrap="none" lIns="91440" tIns="45720" rIns="91440" bIns="45720" numCol="1" vert="horz" anchor="t">
             <a:spAutoFit/>
           </a:bodyPr>
           <a:lstStyle/>
           <a:p>
-            <a:r>
-              <a:rPr lang="ko-KR" altLang="en-US" dirty="0"/>
+            <a:pPr marL="0" indent="0" latinLnBrk="0">
+              <a:buFontTx/>
+              <a:buNone/>
+            </a:pPr>
+            <a:r>
+              <a:rPr lang="ko-KR" altLang="en-US"/>
               <a:t>기상청 </a:t>
             </a:r>
             <a:r>
-              <a:rPr lang="en-US" altLang="ko-KR" dirty="0" err="1"/>
-              <a:t>api</a:t>
-            </a:r>
-            <a:r>
-              <a:rPr lang="en-US" altLang="ko-KR" dirty="0"/>
-              <a:t> server</a:t>
-            </a:r>
-            <a:endParaRPr lang="ko-KR" altLang="en-US" dirty="0"/>
+              <a:rPr lang="en-US" altLang="ko-KR"/>
+              <a:t>api server</a:t>
+            </a:r>
+            <a:endParaRPr lang="ko-KR" altLang="en-US"/>
           </a:p>
         </p:txBody>
       </p:sp>
       <p:cxnSp>
         <p:nvCxnSpPr>
-          <p:cNvPr id="24" name="직선 화살표 연결선 23">
-            <a:extLst>
-              <a:ext uri="{FF2B5EF4-FFF2-40B4-BE49-F238E27FC236}">
-                <a16:creationId xmlns:a16="http://schemas.microsoft.com/office/drawing/2014/main" id="{03E20305-A716-495A-9E73-D0CF1FA9EDB3}"/>
-              </a:ext>
-            </a:extLst>
-          </p:cNvPr>
-          <p:cNvCxnSpPr>
-            <a:cxnSpLocks/>
-          </p:cNvCxnSpPr>
+          <p:cNvPr id="24" name="Rect 0"/>
+          <p:cNvCxnSpPr/>
           <p:nvPr/>
         </p:nvCxnSpPr>
         <p:spPr>
-          <a:xfrm>
-            <a:off x="7051967" y="2096591"/>
-            <a:ext cx="3591303" cy="0"/>
-          </a:xfrm>
-          <a:prstGeom prst="straightConnector1">
-            <a:avLst/>
-          </a:prstGeom>
-          <a:ln>
-            <a:tailEnd type="triangle"/>
+          <a:xfrm rot="0">
+            <a:off x="7051675" y="2096770"/>
+            <a:ext cx="3592195" cy="635"/>
+          </a:xfrm>
+          <a:prstGeom prst="straightConnector1"/>
+          <a:ln w="6350" cap="flat" cmpd="sng">
+            <a:prstDash/>
+            <a:tailEnd type="triangle" w="med" len="med"/>
           </a:ln>
         </p:spPr>
         <p:style>
@@ -3965,29 +4828,19 @@
       </p:cxnSp>
       <p:cxnSp>
         <p:nvCxnSpPr>
-          <p:cNvPr id="25" name="직선 화살표 연결선 24">
-            <a:extLst>
-              <a:ext uri="{FF2B5EF4-FFF2-40B4-BE49-F238E27FC236}">
-                <a16:creationId xmlns:a16="http://schemas.microsoft.com/office/drawing/2014/main" id="{E925BEDC-91CC-4344-B10B-74DF9690F371}"/>
-              </a:ext>
-            </a:extLst>
-          </p:cNvPr>
-          <p:cNvCxnSpPr>
-            <a:cxnSpLocks/>
-          </p:cNvCxnSpPr>
+          <p:cNvPr id="25" name="Rect 0"/>
+          <p:cNvCxnSpPr/>
           <p:nvPr/>
         </p:nvCxnSpPr>
         <p:spPr>
-          <a:xfrm>
-            <a:off x="7051967" y="3689864"/>
-            <a:ext cx="3591303" cy="0"/>
-          </a:xfrm>
-          <a:prstGeom prst="straightConnector1">
-            <a:avLst/>
-          </a:prstGeom>
-          <a:ln>
-            <a:headEnd type="triangle"/>
-            <a:tailEnd type="none"/>
+          <a:xfrm rot="0">
+            <a:off x="7051675" y="3689985"/>
+            <a:ext cx="3592195" cy="635"/>
+          </a:xfrm>
+          <a:prstGeom prst="straightConnector1"/>
+          <a:ln w="6350" cap="flat" cmpd="sng">
+            <a:prstDash/>
+            <a:headEnd type="triangle" w="med" len="med"/>
           </a:ln>
         </p:spPr>
         <p:style>
@@ -4007,26 +4860,19 @@
       </p:cxnSp>
       <p:cxnSp>
         <p:nvCxnSpPr>
-          <p:cNvPr id="30" name="직선 화살표 연결선 29">
-            <a:extLst>
-              <a:ext uri="{FF2B5EF4-FFF2-40B4-BE49-F238E27FC236}">
-                <a16:creationId xmlns:a16="http://schemas.microsoft.com/office/drawing/2014/main" id="{7FA68B9A-3921-40E2-AF2E-75C54C310034}"/>
-              </a:ext>
-            </a:extLst>
-          </p:cNvPr>
+          <p:cNvPr id="30" name="Rect 0"/>
           <p:cNvCxnSpPr/>
           <p:nvPr/>
         </p:nvCxnSpPr>
         <p:spPr>
-          <a:xfrm>
-            <a:off x="7051967" y="5088081"/>
-            <a:ext cx="1163778" cy="0"/>
-          </a:xfrm>
-          <a:prstGeom prst="straightConnector1">
-            <a:avLst/>
-          </a:prstGeom>
-          <a:ln>
-            <a:tailEnd type="triangle"/>
+          <a:xfrm rot="0">
+            <a:off x="7051675" y="5088255"/>
+            <a:ext cx="1164590" cy="635"/>
+          </a:xfrm>
+          <a:prstGeom prst="straightConnector1"/>
+          <a:ln w="6350" cap="flat" cmpd="sng">
+            <a:prstDash/>
+            <a:tailEnd type="triangle" w="med" len="med"/>
           </a:ln>
         </p:spPr>
         <p:style>
@@ -4046,27 +4892,19 @@
       </p:cxnSp>
       <p:cxnSp>
         <p:nvCxnSpPr>
-          <p:cNvPr id="31" name="직선 화살표 연결선 30">
-            <a:extLst>
-              <a:ext uri="{FF2B5EF4-FFF2-40B4-BE49-F238E27FC236}">
-                <a16:creationId xmlns:a16="http://schemas.microsoft.com/office/drawing/2014/main" id="{D65A70B0-C116-42D6-8CD4-99372BBD0B15}"/>
-              </a:ext>
-            </a:extLst>
-          </p:cNvPr>
+          <p:cNvPr id="31" name="Rect 0"/>
           <p:cNvCxnSpPr/>
           <p:nvPr/>
         </p:nvCxnSpPr>
         <p:spPr>
-          <a:xfrm>
-            <a:off x="7051967" y="5557404"/>
-            <a:ext cx="1163778" cy="0"/>
-          </a:xfrm>
-          <a:prstGeom prst="straightConnector1">
-            <a:avLst/>
-          </a:prstGeom>
-          <a:ln>
-            <a:headEnd type="triangle"/>
-            <a:tailEnd type="none"/>
+          <a:xfrm rot="0">
+            <a:off x="7051675" y="5557520"/>
+            <a:ext cx="1164590" cy="635"/>
+          </a:xfrm>
+          <a:prstGeom prst="straightConnector1"/>
+          <a:ln w="6350" cap="flat" cmpd="sng">
+            <a:prstDash/>
+            <a:headEnd type="triangle" w="med" len="med"/>
           </a:ln>
         </p:spPr>
         <p:style>
@@ -4084,20 +4922,185 @@
           </a:fontRef>
         </p:style>
       </p:cxnSp>
+      <p:sp>
+        <p:nvSpPr>
+          <p:cNvPr id="32" name="도형 1"/>
+          <p:cNvSpPr>
+            <a:spLocks/>
+          </p:cNvSpPr>
+          <p:nvPr/>
+        </p:nvSpPr>
+        <p:spPr>
+          <a:xfrm rot="0">
+            <a:off x="242570" y="4366260"/>
+            <a:ext cx="1541145" cy="1436370"/>
+          </a:xfrm>
+          <a:prstGeom prst="rect"/>
+          <a:noFill/>
+        </p:spPr>
+        <p:style>
+          <a:lnRef idx="2">
+            <a:schemeClr val="accent1">
+              <a:shade val="50000"/>
+            </a:schemeClr>
+          </a:lnRef>
+          <a:fillRef idx="1">
+            <a:schemeClr val="accent1"/>
+          </a:fillRef>
+          <a:effectRef idx="0">
+            <a:schemeClr val="accent1"/>
+          </a:effectRef>
+          <a:fontRef idx="minor">
+            <a:schemeClr val="lt1"/>
+          </a:fontRef>
+        </p:style>
+        <p:txBody>
+          <a:bodyPr wrap="square" lIns="91440" tIns="45720" rIns="91440" bIns="45720" numCol="1" vert="horz" anchor="ctr">
+            <a:noAutofit/>
+          </a:bodyPr>
+          <a:lstStyle/>
+          <a:p>
+            <a:pPr marL="0" indent="0" algn="ctr" latinLnBrk="0">
+              <a:buFontTx/>
+              <a:buNone/>
+            </a:pPr>
+            <a:endParaRPr lang="ko-KR" altLang="en-US"/>
+          </a:p>
+        </p:txBody>
+      </p:sp>
+      <p:cxnSp>
+        <p:nvCxnSpPr>
+          <p:cNvPr id="33" name="도형 2"/>
+          <p:cNvCxnSpPr/>
+          <p:nvPr/>
+        </p:nvCxnSpPr>
+        <p:spPr>
+          <a:xfrm rot="0">
+            <a:off x="751205" y="3957320"/>
+            <a:ext cx="635" cy="399415"/>
+          </a:xfrm>
+          <a:prstGeom prst="straightConnector1"/>
+          <a:ln w="6350" cap="flat" cmpd="sng">
+            <a:prstDash/>
+            <a:tailEnd type="triangle" w="med" len="med"/>
+          </a:ln>
+        </p:spPr>
+        <p:style>
+          <a:lnRef idx="1">
+            <a:schemeClr val="accent1"/>
+          </a:lnRef>
+          <a:fillRef idx="0">
+            <a:schemeClr val="accent1"/>
+          </a:fillRef>
+          <a:effectRef idx="0">
+            <a:schemeClr val="accent1"/>
+          </a:effectRef>
+          <a:fontRef idx="minor">
+            <a:schemeClr val="tx1"/>
+          </a:fontRef>
+        </p:style>
+      </p:cxnSp>
+      <p:cxnSp>
+        <p:nvCxnSpPr>
+          <p:cNvPr id="34" name="도형 3"/>
+          <p:cNvCxnSpPr/>
+          <p:nvPr/>
+        </p:nvCxnSpPr>
+        <p:spPr>
+          <a:xfrm rot="0">
+            <a:off x="1167765" y="3940175"/>
+            <a:ext cx="635" cy="415925"/>
+          </a:xfrm>
+          <a:prstGeom prst="straightConnector1"/>
+          <a:ln w="6350" cap="flat" cmpd="sng">
+            <a:prstDash/>
+            <a:headEnd type="triangle" w="med" len="med"/>
+          </a:ln>
+        </p:spPr>
+        <p:style>
+          <a:lnRef idx="1">
+            <a:schemeClr val="accent1"/>
+          </a:lnRef>
+          <a:fillRef idx="0">
+            <a:schemeClr val="accent1"/>
+          </a:fillRef>
+          <a:effectRef idx="0">
+            <a:schemeClr val="accent1"/>
+          </a:effectRef>
+          <a:fontRef idx="minor">
+            <a:schemeClr val="tx1"/>
+          </a:fontRef>
+        </p:style>
+      </p:cxnSp>
+      <p:sp>
+        <p:nvSpPr>
+          <p:cNvPr id="37" name="텍스트 상자 6"/>
+          <p:cNvSpPr txBox="1">
+            <a:spLocks/>
+          </p:cNvSpPr>
+          <p:nvPr/>
+        </p:nvSpPr>
+        <p:spPr>
+          <a:xfrm rot="0">
+            <a:off x="299085" y="4348480"/>
+            <a:ext cx="1424305" cy="645795"/>
+          </a:xfrm>
+          <a:prstGeom prst="rect"/>
+          <a:noFill/>
+        </p:spPr>
+        <p:txBody>
+          <a:bodyPr wrap="none" lIns="91440" tIns="45720" rIns="91440" bIns="45720" numCol="1" vert="horz" anchor="t">
+            <a:spAutoFit/>
+          </a:bodyPr>
+          <a:lstStyle/>
+          <a:p>
+            <a:pPr marL="0" indent="0" latinLnBrk="0">
+              <a:buFontTx/>
+              <a:buNone/>
+            </a:pPr>
+            <a:r>
+              <a:rPr lang="ko-KR" altLang="ko-KR"/>
+              <a:t>Geolocation</a:t>
+            </a:r>
+            <a:endParaRPr lang="ko-KR" altLang="en-US"/>
+          </a:p>
+          <a:p>
+            <a:pPr marL="0" indent="0" latinLnBrk="0">
+              <a:buFontTx/>
+              <a:buNone/>
+            </a:pPr>
+            <a:r>
+              <a:rPr lang="ko-KR" altLang="ko-KR"/>
+              <a:t>      api</a:t>
+            </a:r>
+            <a:endParaRPr lang="ko-KR" altLang="en-US"/>
+          </a:p>
+        </p:txBody>
+      </p:sp>
     </p:spTree>
-    <p:extLst>
-      <p:ext uri="{BB962C8B-B14F-4D97-AF65-F5344CB8AC3E}">
-        <p14:creationId xmlns:p14="http://schemas.microsoft.com/office/powerpoint/2010/main" val="1658446871"/>
-      </p:ext>
-    </p:extLst>
   </p:cSld>
   <p:clrMapOvr>
     <a:masterClrMapping/>
   </p:clrMapOvr>
+  <mc:AlternateContent xmlns:mc="http://schemas.openxmlformats.org/markup-compatibility/2006">
+    <mc:Choice xmlns:p14="http://schemas.microsoft.com/office/powerpoint/2010/main" Requires="p14">
+      <p:transition spd="slow" p14:dur="2000"/>
+    </mc:Choice>
+    <mc:Fallback>
+      <p:transition spd="slow"/>
+    </mc:Fallback>
+  </mc:AlternateContent>
+  <p:timing>
+    <p:tnLst>
+      <p:par>
+        <p:cTn id="1" dur="indefinite" restart="never" nodeType="tmRoot"/>
+      </p:par>
+    </p:tnLst>
+  </p:timing>
 </p:sld>
 </file>
 
-<file path=ppt/slides/slide2.xml><?xml version="1.0" encoding="utf-8"?>
+<file path=ppt/slides/slide4.xml><?xml version="1.0" encoding="utf-8"?>
 <p:sld xmlns:a="http://schemas.openxmlformats.org/drawingml/2006/main" xmlns:r="http://schemas.openxmlformats.org/officeDocument/2006/relationships" xmlns:p="http://schemas.openxmlformats.org/presentationml/2006/main">
   <p:cSld>
     <p:spTree>
@@ -4116,24 +5119,18 @@
       </p:grpSpPr>
       <p:sp>
         <p:nvSpPr>
-          <p:cNvPr id="4" name="직사각형 3">
-            <a:extLst>
-              <a:ext uri="{FF2B5EF4-FFF2-40B4-BE49-F238E27FC236}">
-                <a16:creationId xmlns:a16="http://schemas.microsoft.com/office/drawing/2014/main" id="{119D40DD-2F5B-4FEE-A2F0-59FCF1A6D84E}"/>
-              </a:ext>
-            </a:extLst>
-          </p:cNvPr>
-          <p:cNvSpPr/>
+          <p:cNvPr id="4" name="Rect 0"/>
+          <p:cNvSpPr>
+            <a:spLocks/>
+          </p:cNvSpPr>
           <p:nvPr/>
         </p:nvSpPr>
         <p:spPr>
-          <a:xfrm>
-            <a:off x="2341416" y="471053"/>
-            <a:ext cx="4696691" cy="5334001"/>
-          </a:xfrm>
-          <a:prstGeom prst="rect">
-            <a:avLst/>
-          </a:prstGeom>
+          <a:xfrm rot="0">
+            <a:off x="2341245" y="471170"/>
+            <a:ext cx="4697095" cy="5334635"/>
+          </a:xfrm>
+          <a:prstGeom prst="rect"/>
           <a:noFill/>
         </p:spPr>
         <p:style>
@@ -4153,59 +5150,73 @@
           </a:fontRef>
         </p:style>
         <p:txBody>
-          <a:bodyPr rtlCol="0" anchor="ctr"/>
-          <a:lstStyle/>
-          <a:p>
-            <a:pPr algn="ctr"/>
-            <a:endParaRPr lang="ko-KR" altLang="en-US"/>
-          </a:p>
-        </p:txBody>
-      </p:sp>
-      <p:sp>
-        <p:nvSpPr>
-          <p:cNvPr id="5" name="TextBox 4">
-            <a:extLst>
-              <a:ext uri="{FF2B5EF4-FFF2-40B4-BE49-F238E27FC236}">
-                <a16:creationId xmlns:a16="http://schemas.microsoft.com/office/drawing/2014/main" id="{49B6E06A-5916-4A46-9CEF-F7F8A9283CE7}"/>
-              </a:ext>
-            </a:extLst>
-          </p:cNvPr>
-          <p:cNvSpPr txBox="1"/>
+          <a:bodyPr wrap="square" lIns="91440" tIns="45720" rIns="91440" bIns="45720" numCol="1" vert="horz" anchor="ctr">
+            <a:noAutofit/>
+          </a:bodyPr>
+          <a:lstStyle/>
+          <a:p>
+            <a:pPr marL="0" indent="0" algn="ctr" latinLnBrk="0">
+              <a:buFontTx/>
+              <a:buNone/>
+            </a:pPr>
+            <a:endParaRPr lang="ko-KR" altLang="en-US"/>
+          </a:p>
+        </p:txBody>
+      </p:sp>
+      <p:sp>
+        <p:nvSpPr>
+          <p:cNvPr id="5" name="Rect 0"/>
+          <p:cNvSpPr txBox="1">
+            <a:spLocks/>
+          </p:cNvSpPr>
           <p:nvPr/>
         </p:nvSpPr>
         <p:spPr>
-          <a:xfrm>
-            <a:off x="4071643" y="683614"/>
-            <a:ext cx="1107996" cy="369332"/>
-          </a:xfrm>
-          <a:prstGeom prst="rect">
-            <a:avLst/>
-          </a:prstGeom>
+          <a:xfrm rot="0">
+            <a:off x="4071620" y="683895"/>
+            <a:ext cx="1108710" cy="370205"/>
+          </a:xfrm>
+          <a:prstGeom prst="rect"/>
           <a:noFill/>
         </p:spPr>
         <p:txBody>
-          <a:bodyPr wrap="none" rtlCol="0">
+          <a:bodyPr wrap="none" lIns="91440" tIns="45720" rIns="91440" bIns="45720" numCol="1" vert="horz" anchor="t">
             <a:spAutoFit/>
           </a:bodyPr>
           <a:lstStyle/>
           <a:p>
-            <a:r>
-              <a:rPr lang="ko-KR" altLang="en-US" dirty="0"/>
+            <a:pPr marL="0" indent="0" latinLnBrk="0">
+              <a:buFontTx/>
+              <a:buNone/>
+            </a:pPr>
+            <a:r>
+              <a:rPr lang="ko-KR" altLang="en-US"/>
               <a:t>추천엔진</a:t>
             </a:r>
+            <a:endParaRPr lang="ko-KR" altLang="en-US"/>
           </a:p>
         </p:txBody>
       </p:sp>
     </p:spTree>
-    <p:extLst>
-      <p:ext uri="{BB962C8B-B14F-4D97-AF65-F5344CB8AC3E}">
-        <p14:creationId xmlns:p14="http://schemas.microsoft.com/office/powerpoint/2010/main" val="1862696922"/>
-      </p:ext>
-    </p:extLst>
   </p:cSld>
   <p:clrMapOvr>
     <a:masterClrMapping/>
   </p:clrMapOvr>
+  <mc:AlternateContent xmlns:mc="http://schemas.openxmlformats.org/markup-compatibility/2006">
+    <mc:Choice xmlns:p14="http://schemas.microsoft.com/office/powerpoint/2010/main" Requires="p14">
+      <p:transition spd="slow" p14:dur="2000"/>
+    </mc:Choice>
+    <mc:Fallback>
+      <p:transition spd="slow"/>
+    </mc:Fallback>
+  </mc:AlternateContent>
+  <p:timing>
+    <p:tnLst>
+      <p:par>
+        <p:cTn id="1" dur="indefinite" restart="never" nodeType="tmRoot"/>
+      </p:par>
+    </p:tnLst>
+  </p:timing>
 </p:sld>
 </file>
 

--- a/최종발표/아키텍처 예시.pptx
+++ b/최종발표/아키텍처 예시.pptx
@@ -1,14 +1,14 @@
 
 <file path=ppt/presentation.xml><?xml version="1.0" encoding="utf-8"?>
-<p:presentation xmlns:a="http://schemas.openxmlformats.org/drawingml/2006/main" xmlns:r="http://schemas.openxmlformats.org/officeDocument/2006/relationships" xmlns:p="http://schemas.openxmlformats.org/presentationml/2006/main" xmlns:p14="http://schemas.microsoft.com/office/powerpoint/2010/main" saveSubsetFonts="1">
+<p:presentation xmlns:a="http://schemas.openxmlformats.org/drawingml/2006/main" xmlns:r="http://schemas.openxmlformats.org/officeDocument/2006/relationships" xmlns:p="http://schemas.openxmlformats.org/presentationml/2006/main" saveSubsetFonts="1">
   <p:sldMasterIdLst>
-    <p:sldMasterId id="2147483662" r:id="rId13"/>
+    <p:sldMasterId id="2147483662" r:id="rId1"/>
   </p:sldMasterIdLst>
   <p:sldIdLst>
-    <p:sldId id="256" r:id="rId15"/>
-    <p:sldId id="257" r:id="rId16"/>
-    <p:sldId id="258" r:id="rId17"/>
-    <p:sldId id="259" r:id="rId18"/>
+    <p:sldId id="256" r:id="rId2"/>
+    <p:sldId id="257" r:id="rId3"/>
+    <p:sldId id="258" r:id="rId4"/>
+    <p:sldId id="259" r:id="rId5"/>
   </p:sldIdLst>
   <p:sldSz cx="12192000" cy="6858000"/>
   <p:notesSz cx="6858000" cy="9144000"/>
@@ -107,6 +107,11 @@
       </a:defRPr>
     </a:lvl9pPr>
   </p:defaultTextStyle>
+  <p:extLst>
+    <p:ext uri="{EFAFB233-063F-42B5-8137-9DF3F51BA10A}">
+      <p15:sldGuideLst xmlns:p15="http://schemas.microsoft.com/office/powerpoint/2012/main"/>
+    </p:ext>
+  </p:extLst>
 </p:presentation>
 </file>
 
@@ -257,7 +262,7 @@
           <a:p>
             <a:fld id="{76EB83DD-B5C9-4C4E-8738-6A13F2B10E62}" type="datetimeFigureOut">
               <a:rPr lang="ko-KR" altLang="en-US" smtClean="0"/>
-              <a:t>2025-12-17</a:t>
+              <a:t>2025-12-18</a:t>
             </a:fld>
             <a:endParaRPr lang="ko-KR" altLang="en-US"/>
           </a:p>
@@ -455,7 +460,7 @@
           <a:p>
             <a:fld id="{76EB83DD-B5C9-4C4E-8738-6A13F2B10E62}" type="datetimeFigureOut">
               <a:rPr lang="ko-KR" altLang="en-US" smtClean="0"/>
-              <a:t>2025-12-17</a:t>
+              <a:t>2025-12-18</a:t>
             </a:fld>
             <a:endParaRPr lang="ko-KR" altLang="en-US"/>
           </a:p>
@@ -663,7 +668,7 @@
           <a:p>
             <a:fld id="{76EB83DD-B5C9-4C4E-8738-6A13F2B10E62}" type="datetimeFigureOut">
               <a:rPr lang="ko-KR" altLang="en-US" smtClean="0"/>
-              <a:t>2025-12-17</a:t>
+              <a:t>2025-12-18</a:t>
             </a:fld>
             <a:endParaRPr lang="ko-KR" altLang="en-US"/>
           </a:p>
@@ -861,7 +866,7 @@
           <a:p>
             <a:fld id="{76EB83DD-B5C9-4C4E-8738-6A13F2B10E62}" type="datetimeFigureOut">
               <a:rPr lang="ko-KR" altLang="en-US" smtClean="0"/>
-              <a:t>2025-12-17</a:t>
+              <a:t>2025-12-18</a:t>
             </a:fld>
             <a:endParaRPr lang="ko-KR" altLang="en-US"/>
           </a:p>
@@ -1136,7 +1141,7 @@
           <a:p>
             <a:fld id="{76EB83DD-B5C9-4C4E-8738-6A13F2B10E62}" type="datetimeFigureOut">
               <a:rPr lang="ko-KR" altLang="en-US" smtClean="0"/>
-              <a:t>2025-12-17</a:t>
+              <a:t>2025-12-18</a:t>
             </a:fld>
             <a:endParaRPr lang="ko-KR" altLang="en-US"/>
           </a:p>
@@ -1401,7 +1406,7 @@
           <a:p>
             <a:fld id="{76EB83DD-B5C9-4C4E-8738-6A13F2B10E62}" type="datetimeFigureOut">
               <a:rPr lang="ko-KR" altLang="en-US" smtClean="0"/>
-              <a:t>2025-12-17</a:t>
+              <a:t>2025-12-18</a:t>
             </a:fld>
             <a:endParaRPr lang="ko-KR" altLang="en-US"/>
           </a:p>
@@ -1813,7 +1818,7 @@
           <a:p>
             <a:fld id="{76EB83DD-B5C9-4C4E-8738-6A13F2B10E62}" type="datetimeFigureOut">
               <a:rPr lang="ko-KR" altLang="en-US" smtClean="0"/>
-              <a:t>2025-12-17</a:t>
+              <a:t>2025-12-18</a:t>
             </a:fld>
             <a:endParaRPr lang="ko-KR" altLang="en-US"/>
           </a:p>
@@ -1954,7 +1959,7 @@
           <a:p>
             <a:fld id="{76EB83DD-B5C9-4C4E-8738-6A13F2B10E62}" type="datetimeFigureOut">
               <a:rPr lang="ko-KR" altLang="en-US" smtClean="0"/>
-              <a:t>2025-12-17</a:t>
+              <a:t>2025-12-18</a:t>
             </a:fld>
             <a:endParaRPr lang="ko-KR" altLang="en-US"/>
           </a:p>
@@ -2067,7 +2072,7 @@
           <a:p>
             <a:fld id="{76EB83DD-B5C9-4C4E-8738-6A13F2B10E62}" type="datetimeFigureOut">
               <a:rPr lang="ko-KR" altLang="en-US" smtClean="0"/>
-              <a:t>2025-12-17</a:t>
+              <a:t>2025-12-18</a:t>
             </a:fld>
             <a:endParaRPr lang="ko-KR" altLang="en-US"/>
           </a:p>
@@ -2378,7 +2383,7 @@
           <a:p>
             <a:fld id="{76EB83DD-B5C9-4C4E-8738-6A13F2B10E62}" type="datetimeFigureOut">
               <a:rPr lang="ko-KR" altLang="en-US" smtClean="0"/>
-              <a:t>2025-12-17</a:t>
+              <a:t>2025-12-18</a:t>
             </a:fld>
             <a:endParaRPr lang="ko-KR" altLang="en-US"/>
           </a:p>
@@ -2666,7 +2671,7 @@
           <a:p>
             <a:fld id="{76EB83DD-B5C9-4C4E-8738-6A13F2B10E62}" type="datetimeFigureOut">
               <a:rPr lang="ko-KR" altLang="en-US" smtClean="0"/>
-              <a:t>2025-12-17</a:t>
+              <a:t>2025-12-18</a:t>
             </a:fld>
             <a:endParaRPr lang="ko-KR" altLang="en-US"/>
           </a:p>
@@ -2907,7 +2912,7 @@
           <a:p>
             <a:fld id="{76EB83DD-B5C9-4C4E-8738-6A13F2B10E62}" type="datetimeFigureOut">
               <a:rPr lang="ko-KR" altLang="en-US" smtClean="0"/>
-              <a:t>2025-12-17</a:t>
+              <a:t>2025-12-18</a:t>
             </a:fld>
             <a:endParaRPr lang="ko-KR" altLang="en-US"/>
           </a:p>
@@ -3308,7 +3313,7 @@
 </file>
 
 <file path=ppt/slides/slide1.xml><?xml version="1.0" encoding="utf-8"?>
-<p:sld xmlns:a="http://schemas.openxmlformats.org/drawingml/2006/main" xmlns:r="http://schemas.openxmlformats.org/officeDocument/2006/relationships" xmlns:p="http://schemas.openxmlformats.org/presentationml/2006/main" xmlns:p14="http://schemas.microsoft.com/office/powerpoint/2010/main">
+<p:sld xmlns:a="http://schemas.openxmlformats.org/drawingml/2006/main" xmlns:r="http://schemas.openxmlformats.org/officeDocument/2006/relationships" xmlns:p="http://schemas.openxmlformats.org/presentationml/2006/main">
   <p:cSld>
     <p:spTree>
       <p:nvGrpSpPr>
@@ -4096,26 +4101,11 @@
   <p:clrMapOvr>
     <a:masterClrMapping/>
   </p:clrMapOvr>
-  <mc:AlternateContent xmlns:mc="http://schemas.openxmlformats.org/markup-compatibility/2006">
-    <mc:Choice xmlns:p14="http://schemas.microsoft.com/office/powerpoint/2010/main" Requires="p14">
-      <p:transition spd="slow" p14:dur="2000"/>
-    </mc:Choice>
-    <mc:Fallback>
-      <p:transition spd="slow"/>
-    </mc:Fallback>
-  </mc:AlternateContent>
-  <p:timing>
-    <p:tnLst>
-      <p:par>
-        <p:cTn id="1" dur="indefinite" restart="never" nodeType="tmRoot"/>
-      </p:par>
-    </p:tnLst>
-  </p:timing>
 </p:sld>
 </file>
 
 <file path=ppt/slides/slide2.xml><?xml version="1.0" encoding="utf-8"?>
-<p:sld xmlns:a="http://schemas.openxmlformats.org/drawingml/2006/main" xmlns:r="http://schemas.openxmlformats.org/officeDocument/2006/relationships" xmlns:p="http://schemas.openxmlformats.org/presentationml/2006/main" xmlns:p14="http://schemas.microsoft.com/office/powerpoint/2010/main">
+<p:sld xmlns:a="http://schemas.openxmlformats.org/drawingml/2006/main" xmlns:r="http://schemas.openxmlformats.org/officeDocument/2006/relationships" xmlns:p="http://schemas.openxmlformats.org/presentationml/2006/main">
   <p:cSld>
     <p:spTree>
       <p:nvGrpSpPr>
@@ -4223,21 +4213,6 @@
   <p:clrMapOvr>
     <a:masterClrMapping/>
   </p:clrMapOvr>
-  <mc:AlternateContent xmlns:mc="http://schemas.openxmlformats.org/markup-compatibility/2006">
-    <mc:Choice xmlns:p14="http://schemas.microsoft.com/office/powerpoint/2010/main" Requires="p14">
-      <p:transition spd="slow" p14:dur="2000"/>
-    </mc:Choice>
-    <mc:Fallback>
-      <p:transition spd="slow"/>
-    </mc:Fallback>
-  </mc:AlternateContent>
-  <p:timing>
-    <p:tnLst>
-      <p:par>
-        <p:cTn id="1" dur="indefinite" restart="never" nodeType="tmRoot"/>
-      </p:par>
-    </p:tnLst>
-  </p:timing>
 </p:sld>
 </file>
 
@@ -4267,11 +4242,13 @@
           <p:nvPr/>
         </p:nvSpPr>
         <p:spPr>
-          <a:xfrm rot="0">
+          <a:xfrm>
             <a:off x="2341245" y="471170"/>
             <a:ext cx="4697095" cy="5334635"/>
           </a:xfrm>
-          <a:prstGeom prst="rect"/>
+          <a:prstGeom prst="rect">
+            <a:avLst/>
+          </a:prstGeom>
           <a:noFill/>
         </p:spPr>
         <p:style>
@@ -4291,7 +4268,7 @@
           </a:fontRef>
         </p:style>
         <p:txBody>
-          <a:bodyPr wrap="square" lIns="91440" tIns="45720" rIns="91440" bIns="45720" numCol="1" vert="horz" anchor="ctr">
+          <a:bodyPr vert="horz" wrap="square" lIns="91440" tIns="45720" rIns="91440" bIns="45720" numCol="1" anchor="ctr">
             <a:noAutofit/>
           </a:bodyPr>
           <a:lstStyle/>
@@ -4313,15 +4290,17 @@
           <p:nvPr/>
         </p:nvSpPr>
         <p:spPr>
-          <a:xfrm rot="0">
+          <a:xfrm>
             <a:off x="4071620" y="683895"/>
             <a:ext cx="1236980" cy="370205"/>
           </a:xfrm>
-          <a:prstGeom prst="rect"/>
+          <a:prstGeom prst="rect">
+            <a:avLst/>
+          </a:prstGeom>
           <a:noFill/>
         </p:spPr>
         <p:txBody>
-          <a:bodyPr wrap="none" lIns="91440" tIns="45720" rIns="91440" bIns="45720" numCol="1" vert="horz" anchor="t">
+          <a:bodyPr vert="horz" wrap="none" lIns="91440" tIns="45720" rIns="91440" bIns="45720" numCol="1" anchor="t">
             <a:spAutoFit/>
           </a:bodyPr>
           <a:lstStyle/>
@@ -4338,7 +4317,6 @@
               <a:rPr lang="ko-KR" altLang="en-US"/>
               <a:t>서버</a:t>
             </a:r>
-            <a:endParaRPr lang="ko-KR" altLang="en-US"/>
           </a:p>
         </p:txBody>
       </p:sp>
@@ -4351,11 +4329,13 @@
           <p:nvPr/>
         </p:nvSpPr>
         <p:spPr>
-          <a:xfrm rot="0">
+          <a:xfrm>
             <a:off x="8215630" y="946785"/>
             <a:ext cx="1635760" cy="2988945"/>
           </a:xfrm>
-          <a:prstGeom prst="rect"/>
+          <a:prstGeom prst="rect">
+            <a:avLst/>
+          </a:prstGeom>
           <a:noFill/>
         </p:spPr>
         <p:style>
@@ -4375,7 +4355,7 @@
           </a:fontRef>
         </p:style>
         <p:txBody>
-          <a:bodyPr wrap="square" lIns="91440" tIns="45720" rIns="91440" bIns="45720" numCol="1" vert="horz" anchor="ctr">
+          <a:bodyPr vert="horz" wrap="square" lIns="91440" tIns="45720" rIns="91440" bIns="45720" numCol="1" anchor="ctr">
             <a:noAutofit/>
           </a:bodyPr>
           <a:lstStyle/>
@@ -4397,15 +4377,17 @@
           <p:nvPr/>
         </p:nvSpPr>
         <p:spPr>
-          <a:xfrm rot="0">
+          <a:xfrm>
             <a:off x="8070850" y="471170"/>
             <a:ext cx="1925320" cy="370205"/>
           </a:xfrm>
-          <a:prstGeom prst="rect"/>
+          <a:prstGeom prst="rect">
+            <a:avLst/>
+          </a:prstGeom>
           <a:noFill/>
         </p:spPr>
         <p:txBody>
-          <a:bodyPr wrap="none" lIns="91440" tIns="45720" rIns="91440" bIns="45720" numCol="1" vert="horz" anchor="t">
+          <a:bodyPr vert="horz" wrap="none" lIns="91440" tIns="45720" rIns="91440" bIns="45720" numCol="1" anchor="t">
             <a:spAutoFit/>
           </a:bodyPr>
           <a:lstStyle/>
@@ -4429,11 +4411,13 @@
           <p:nvPr/>
         </p:nvCxnSpPr>
         <p:spPr>
-          <a:xfrm rot="0">
+          <a:xfrm>
             <a:off x="7051675" y="1944370"/>
             <a:ext cx="1164590" cy="635"/>
           </a:xfrm>
-          <a:prstGeom prst="straightConnector1"/>
+          <a:prstGeom prst="straightConnector1">
+            <a:avLst/>
+          </a:prstGeom>
           <a:ln w="6350" cap="flat" cmpd="sng">
             <a:prstDash/>
             <a:tailEnd type="triangle" w="med" len="med"/>
@@ -4461,11 +4445,13 @@
           <p:nvPr/>
         </p:nvCxnSpPr>
         <p:spPr>
-          <a:xfrm rot="0">
+          <a:xfrm>
             <a:off x="7051675" y="3537585"/>
             <a:ext cx="1164590" cy="635"/>
           </a:xfrm>
-          <a:prstGeom prst="straightConnector1"/>
+          <a:prstGeom prst="straightConnector1">
+            <a:avLst/>
+          </a:prstGeom>
           <a:ln w="6350" cap="flat" cmpd="sng">
             <a:prstDash/>
             <a:headEnd type="triangle" w="med" len="med"/>
@@ -4495,11 +4481,13 @@
           <p:nvPr/>
         </p:nvSpPr>
         <p:spPr>
-          <a:xfrm rot="0">
+          <a:xfrm>
             <a:off x="247650" y="471170"/>
             <a:ext cx="1524635" cy="3486785"/>
           </a:xfrm>
-          <a:prstGeom prst="rect"/>
+          <a:prstGeom prst="rect">
+            <a:avLst/>
+          </a:prstGeom>
           <a:noFill/>
         </p:spPr>
         <p:style>
@@ -4519,7 +4507,7 @@
           </a:fontRef>
         </p:style>
         <p:txBody>
-          <a:bodyPr wrap="square" lIns="91440" tIns="45720" rIns="91440" bIns="45720" numCol="1" vert="horz" anchor="ctr">
+          <a:bodyPr vert="horz" wrap="square" lIns="91440" tIns="45720" rIns="91440" bIns="45720" numCol="1" anchor="ctr">
             <a:noAutofit/>
           </a:bodyPr>
           <a:lstStyle/>
@@ -4541,15 +4529,17 @@
           <p:nvPr/>
         </p:nvSpPr>
         <p:spPr>
-          <a:xfrm rot="0">
+          <a:xfrm>
             <a:off x="575945" y="683895"/>
             <a:ext cx="742950" cy="370205"/>
           </a:xfrm>
-          <a:prstGeom prst="rect"/>
+          <a:prstGeom prst="rect">
+            <a:avLst/>
+          </a:prstGeom>
           <a:noFill/>
         </p:spPr>
         <p:txBody>
-          <a:bodyPr wrap="none" lIns="91440" tIns="45720" rIns="91440" bIns="45720" numCol="1" vert="horz" anchor="t">
+          <a:bodyPr vert="horz" wrap="none" lIns="91440" tIns="45720" rIns="91440" bIns="45720" numCol="1" anchor="t">
             <a:spAutoFit/>
           </a:bodyPr>
           <a:lstStyle/>
@@ -4573,11 +4563,13 @@
           <p:nvPr/>
         </p:nvCxnSpPr>
         <p:spPr>
-          <a:xfrm rot="0">
+          <a:xfrm>
             <a:off x="1771650" y="2341245"/>
             <a:ext cx="570230" cy="635"/>
           </a:xfrm>
-          <a:prstGeom prst="straightConnector1"/>
+          <a:prstGeom prst="straightConnector1">
+            <a:avLst/>
+          </a:prstGeom>
           <a:ln w="6350" cap="flat" cmpd="sng">
             <a:prstDash/>
             <a:tailEnd type="triangle" w="med" len="med"/>
@@ -4605,11 +4597,13 @@
           <p:nvPr/>
         </p:nvCxnSpPr>
         <p:spPr>
-          <a:xfrm rot="0">
+          <a:xfrm>
             <a:off x="1762760" y="2964815"/>
             <a:ext cx="570230" cy="635"/>
           </a:xfrm>
-          <a:prstGeom prst="straightConnector1"/>
+          <a:prstGeom prst="straightConnector1">
+            <a:avLst/>
+          </a:prstGeom>
           <a:ln w="6350" cap="flat" cmpd="sng">
             <a:prstDash/>
             <a:headEnd type="triangle" w="med" len="med"/>
@@ -4639,11 +4633,13 @@
           <p:nvPr/>
         </p:nvSpPr>
         <p:spPr>
-          <a:xfrm rot="0">
+          <a:xfrm>
             <a:off x="8215630" y="4476115"/>
             <a:ext cx="1635760" cy="1436370"/>
           </a:xfrm>
-          <a:prstGeom prst="rect"/>
+          <a:prstGeom prst="rect">
+            <a:avLst/>
+          </a:prstGeom>
           <a:noFill/>
         </p:spPr>
         <p:style>
@@ -4663,7 +4659,7 @@
           </a:fontRef>
         </p:style>
         <p:txBody>
-          <a:bodyPr wrap="square" lIns="91440" tIns="45720" rIns="91440" bIns="45720" numCol="1" vert="horz" anchor="ctr">
+          <a:bodyPr vert="horz" wrap="square" lIns="91440" tIns="45720" rIns="91440" bIns="45720" numCol="1" anchor="ctr">
             <a:noAutofit/>
           </a:bodyPr>
           <a:lstStyle/>
@@ -4685,15 +4681,17 @@
           <p:nvPr/>
         </p:nvSpPr>
         <p:spPr>
-          <a:xfrm rot="0">
+          <a:xfrm>
             <a:off x="8634730" y="4112260"/>
             <a:ext cx="797560" cy="370205"/>
           </a:xfrm>
-          <a:prstGeom prst="rect"/>
+          <a:prstGeom prst="rect">
+            <a:avLst/>
+          </a:prstGeom>
           <a:noFill/>
         </p:spPr>
         <p:txBody>
-          <a:bodyPr wrap="none" lIns="91440" tIns="45720" rIns="91440" bIns="45720" numCol="1" vert="horz" anchor="t">
+          <a:bodyPr vert="horz" wrap="none" lIns="91440" tIns="45720" rIns="91440" bIns="45720" numCol="1" anchor="t">
             <a:spAutoFit/>
           </a:bodyPr>
           <a:lstStyle/>
@@ -4719,11 +4717,13 @@
           <p:nvPr/>
         </p:nvSpPr>
         <p:spPr>
-          <a:xfrm rot="0">
+          <a:xfrm>
             <a:off x="10643235" y="1934845"/>
             <a:ext cx="1635760" cy="2988945"/>
           </a:xfrm>
-          <a:prstGeom prst="rect"/>
+          <a:prstGeom prst="rect">
+            <a:avLst/>
+          </a:prstGeom>
           <a:noFill/>
         </p:spPr>
         <p:style>
@@ -4743,7 +4743,7 @@
           </a:fontRef>
         </p:style>
         <p:txBody>
-          <a:bodyPr wrap="square" lIns="91440" tIns="45720" rIns="91440" bIns="45720" numCol="1" vert="horz" anchor="ctr">
+          <a:bodyPr vert="horz" wrap="square" lIns="91440" tIns="45720" rIns="91440" bIns="45720" numCol="1" anchor="ctr">
             <a:noAutofit/>
           </a:bodyPr>
           <a:lstStyle/>
@@ -4765,15 +4765,17 @@
           <p:nvPr/>
         </p:nvSpPr>
         <p:spPr>
-          <a:xfrm rot="0">
+          <a:xfrm>
             <a:off x="10498455" y="1459230"/>
             <a:ext cx="1986280" cy="370205"/>
           </a:xfrm>
-          <a:prstGeom prst="rect"/>
+          <a:prstGeom prst="rect">
+            <a:avLst/>
+          </a:prstGeom>
           <a:noFill/>
         </p:spPr>
         <p:txBody>
-          <a:bodyPr wrap="none" lIns="91440" tIns="45720" rIns="91440" bIns="45720" numCol="1" vert="horz" anchor="t">
+          <a:bodyPr vert="horz" wrap="none" lIns="91440" tIns="45720" rIns="91440" bIns="45720" numCol="1" anchor="t">
             <a:spAutoFit/>
           </a:bodyPr>
           <a:lstStyle/>
@@ -4801,11 +4803,13 @@
           <p:nvPr/>
         </p:nvCxnSpPr>
         <p:spPr>
-          <a:xfrm rot="0">
+          <a:xfrm>
             <a:off x="7051675" y="2096770"/>
             <a:ext cx="3592195" cy="635"/>
           </a:xfrm>
-          <a:prstGeom prst="straightConnector1"/>
+          <a:prstGeom prst="straightConnector1">
+            <a:avLst/>
+          </a:prstGeom>
           <a:ln w="6350" cap="flat" cmpd="sng">
             <a:prstDash/>
             <a:tailEnd type="triangle" w="med" len="med"/>
@@ -4833,11 +4837,13 @@
           <p:nvPr/>
         </p:nvCxnSpPr>
         <p:spPr>
-          <a:xfrm rot="0">
+          <a:xfrm>
             <a:off x="7051675" y="3689985"/>
             <a:ext cx="3592195" cy="635"/>
           </a:xfrm>
-          <a:prstGeom prst="straightConnector1"/>
+          <a:prstGeom prst="straightConnector1">
+            <a:avLst/>
+          </a:prstGeom>
           <a:ln w="6350" cap="flat" cmpd="sng">
             <a:prstDash/>
             <a:headEnd type="triangle" w="med" len="med"/>
@@ -4865,11 +4871,13 @@
           <p:nvPr/>
         </p:nvCxnSpPr>
         <p:spPr>
-          <a:xfrm rot="0">
+          <a:xfrm>
             <a:off x="7051675" y="5088255"/>
             <a:ext cx="1164590" cy="635"/>
           </a:xfrm>
-          <a:prstGeom prst="straightConnector1"/>
+          <a:prstGeom prst="straightConnector1">
+            <a:avLst/>
+          </a:prstGeom>
           <a:ln w="6350" cap="flat" cmpd="sng">
             <a:prstDash/>
             <a:tailEnd type="triangle" w="med" len="med"/>
@@ -4897,11 +4905,13 @@
           <p:nvPr/>
         </p:nvCxnSpPr>
         <p:spPr>
-          <a:xfrm rot="0">
+          <a:xfrm>
             <a:off x="7051675" y="5557520"/>
             <a:ext cx="1164590" cy="635"/>
           </a:xfrm>
-          <a:prstGeom prst="straightConnector1"/>
+          <a:prstGeom prst="straightConnector1">
+            <a:avLst/>
+          </a:prstGeom>
           <a:ln w="6350" cap="flat" cmpd="sng">
             <a:prstDash/>
             <a:headEnd type="triangle" w="med" len="med"/>
@@ -4931,11 +4941,13 @@
           <p:nvPr/>
         </p:nvSpPr>
         <p:spPr>
-          <a:xfrm rot="0">
+          <a:xfrm>
             <a:off x="242570" y="4366260"/>
             <a:ext cx="1541145" cy="1436370"/>
           </a:xfrm>
-          <a:prstGeom prst="rect"/>
+          <a:prstGeom prst="rect">
+            <a:avLst/>
+          </a:prstGeom>
           <a:noFill/>
         </p:spPr>
         <p:style>
@@ -4955,7 +4967,7 @@
           </a:fontRef>
         </p:style>
         <p:txBody>
-          <a:bodyPr wrap="square" lIns="91440" tIns="45720" rIns="91440" bIns="45720" numCol="1" vert="horz" anchor="ctr">
+          <a:bodyPr vert="horz" wrap="square" lIns="91440" tIns="45720" rIns="91440" bIns="45720" numCol="1" anchor="ctr">
             <a:noAutofit/>
           </a:bodyPr>
           <a:lstStyle/>
@@ -4975,11 +4987,13 @@
           <p:nvPr/>
         </p:nvCxnSpPr>
         <p:spPr>
-          <a:xfrm rot="0">
+          <a:xfrm>
             <a:off x="751205" y="3957320"/>
             <a:ext cx="635" cy="399415"/>
           </a:xfrm>
-          <a:prstGeom prst="straightConnector1"/>
+          <a:prstGeom prst="straightConnector1">
+            <a:avLst/>
+          </a:prstGeom>
           <a:ln w="6350" cap="flat" cmpd="sng">
             <a:prstDash/>
             <a:tailEnd type="triangle" w="med" len="med"/>
@@ -5007,11 +5021,13 @@
           <p:nvPr/>
         </p:nvCxnSpPr>
         <p:spPr>
-          <a:xfrm rot="0">
+          <a:xfrm>
             <a:off x="1167765" y="3940175"/>
             <a:ext cx="635" cy="415925"/>
           </a:xfrm>
-          <a:prstGeom prst="straightConnector1"/>
+          <a:prstGeom prst="straightConnector1">
+            <a:avLst/>
+          </a:prstGeom>
           <a:ln w="6350" cap="flat" cmpd="sng">
             <a:prstDash/>
             <a:headEnd type="triangle" w="med" len="med"/>
@@ -5041,15 +5057,17 @@
           <p:nvPr/>
         </p:nvSpPr>
         <p:spPr>
-          <a:xfrm rot="0">
+          <a:xfrm>
             <a:off x="299085" y="4348480"/>
             <a:ext cx="1424305" cy="645795"/>
           </a:xfrm>
-          <a:prstGeom prst="rect"/>
+          <a:prstGeom prst="rect">
+            <a:avLst/>
+          </a:prstGeom>
           <a:noFill/>
         </p:spPr>
         <p:txBody>
-          <a:bodyPr wrap="none" lIns="91440" tIns="45720" rIns="91440" bIns="45720" numCol="1" vert="horz" anchor="t">
+          <a:bodyPr vert="horz" wrap="none" lIns="91440" tIns="45720" rIns="91440" bIns="45720" numCol="1" anchor="t">
             <a:spAutoFit/>
           </a:bodyPr>
           <a:lstStyle/>
@@ -5082,21 +5100,6 @@
   <p:clrMapOvr>
     <a:masterClrMapping/>
   </p:clrMapOvr>
-  <mc:AlternateContent xmlns:mc="http://schemas.openxmlformats.org/markup-compatibility/2006">
-    <mc:Choice xmlns:p14="http://schemas.microsoft.com/office/powerpoint/2010/main" Requires="p14">
-      <p:transition spd="slow" p14:dur="2000"/>
-    </mc:Choice>
-    <mc:Fallback>
-      <p:transition spd="slow"/>
-    </mc:Fallback>
-  </mc:AlternateContent>
-  <p:timing>
-    <p:tnLst>
-      <p:par>
-        <p:cTn id="1" dur="indefinite" restart="never" nodeType="tmRoot"/>
-      </p:par>
-    </p:tnLst>
-  </p:timing>
 </p:sld>
 </file>
 
@@ -5126,11 +5129,13 @@
           <p:nvPr/>
         </p:nvSpPr>
         <p:spPr>
-          <a:xfrm rot="0">
+          <a:xfrm>
             <a:off x="2341245" y="471170"/>
             <a:ext cx="4697095" cy="5334635"/>
           </a:xfrm>
-          <a:prstGeom prst="rect"/>
+          <a:prstGeom prst="rect">
+            <a:avLst/>
+          </a:prstGeom>
           <a:noFill/>
         </p:spPr>
         <p:style>
@@ -5150,7 +5155,7 @@
           </a:fontRef>
         </p:style>
         <p:txBody>
-          <a:bodyPr wrap="square" lIns="91440" tIns="45720" rIns="91440" bIns="45720" numCol="1" vert="horz" anchor="ctr">
+          <a:bodyPr vert="horz" wrap="square" lIns="91440" tIns="45720" rIns="91440" bIns="45720" numCol="1" anchor="ctr">
             <a:noAutofit/>
           </a:bodyPr>
           <a:lstStyle/>
@@ -5172,15 +5177,17 @@
           <p:nvPr/>
         </p:nvSpPr>
         <p:spPr>
-          <a:xfrm rot="0">
+          <a:xfrm>
             <a:off x="4071620" y="683895"/>
             <a:ext cx="1108710" cy="370205"/>
           </a:xfrm>
-          <a:prstGeom prst="rect"/>
+          <a:prstGeom prst="rect">
+            <a:avLst/>
+          </a:prstGeom>
           <a:noFill/>
         </p:spPr>
         <p:txBody>
-          <a:bodyPr wrap="none" lIns="91440" tIns="45720" rIns="91440" bIns="45720" numCol="1" vert="horz" anchor="t">
+          <a:bodyPr vert="horz" wrap="none" lIns="91440" tIns="45720" rIns="91440" bIns="45720" numCol="1" anchor="t">
             <a:spAutoFit/>
           </a:bodyPr>
           <a:lstStyle/>
@@ -5193,7 +5200,6 @@
               <a:rPr lang="ko-KR" altLang="en-US"/>
               <a:t>추천엔진</a:t>
             </a:r>
-            <a:endParaRPr lang="ko-KR" altLang="en-US"/>
           </a:p>
         </p:txBody>
       </p:sp>
@@ -5202,21 +5208,6 @@
   <p:clrMapOvr>
     <a:masterClrMapping/>
   </p:clrMapOvr>
-  <mc:AlternateContent xmlns:mc="http://schemas.openxmlformats.org/markup-compatibility/2006">
-    <mc:Choice xmlns:p14="http://schemas.microsoft.com/office/powerpoint/2010/main" Requires="p14">
-      <p:transition spd="slow" p14:dur="2000"/>
-    </mc:Choice>
-    <mc:Fallback>
-      <p:transition spd="slow"/>
-    </mc:Fallback>
-  </mc:AlternateContent>
-  <p:timing>
-    <p:tnLst>
-      <p:par>
-        <p:cTn id="1" dur="indefinite" restart="never" nodeType="tmRoot"/>
-      </p:par>
-    </p:tnLst>
-  </p:timing>
 </p:sld>
 </file>
 

--- a/최종발표/아키텍처 예시.pptx
+++ b/최종발표/아키텍처 예시.pptx
@@ -1,14 +1,14 @@
 
 <file path=ppt/presentation.xml><?xml version="1.0" encoding="utf-8"?>
-<p:presentation xmlns:a="http://schemas.openxmlformats.org/drawingml/2006/main" xmlns:r="http://schemas.openxmlformats.org/officeDocument/2006/relationships" xmlns:p="http://schemas.openxmlformats.org/presentationml/2006/main" saveSubsetFonts="1">
+<p:presentation xmlns:a="http://schemas.openxmlformats.org/drawingml/2006/main" xmlns:r="http://schemas.openxmlformats.org/officeDocument/2006/relationships" xmlns:p="http://schemas.openxmlformats.org/presentationml/2006/main" xmlns:p14="http://schemas.microsoft.com/office/powerpoint/2010/main" saveSubsetFonts="1">
   <p:sldMasterIdLst>
-    <p:sldMasterId id="2147483662" r:id="rId1"/>
+    <p:sldMasterId id="2147483675" r:id="rId13"/>
   </p:sldMasterIdLst>
   <p:sldIdLst>
-    <p:sldId id="256" r:id="rId2"/>
-    <p:sldId id="257" r:id="rId3"/>
-    <p:sldId id="258" r:id="rId4"/>
-    <p:sldId id="259" r:id="rId5"/>
+    <p:sldId id="256" r:id="rId15"/>
+    <p:sldId id="257" r:id="rId16"/>
+    <p:sldId id="258" r:id="rId17"/>
+    <p:sldId id="259" r:id="rId18"/>
   </p:sldIdLst>
   <p:sldSz cx="12192000" cy="6858000"/>
   <p:notesSz cx="6858000" cy="9144000"/>
@@ -107,11 +107,7 @@
       </a:defRPr>
     </a:lvl9pPr>
   </p:defaultTextStyle>
-  <p:extLst>
-    <p:ext uri="{EFAFB233-063F-42B5-8137-9DF3F51BA10A}">
-      <p15:sldGuideLst xmlns:p15="http://schemas.microsoft.com/office/powerpoint/2012/main"/>
-    </p:ext>
-  </p:extLst>
+  <p:extLst/>
 </p:presentation>
 </file>
 
@@ -3313,7 +3309,7 @@
 </file>
 
 <file path=ppt/slides/slide1.xml><?xml version="1.0" encoding="utf-8"?>
-<p:sld xmlns:a="http://schemas.openxmlformats.org/drawingml/2006/main" xmlns:r="http://schemas.openxmlformats.org/officeDocument/2006/relationships" xmlns:p="http://schemas.openxmlformats.org/presentationml/2006/main">
+<p:sld xmlns:a="http://schemas.openxmlformats.org/drawingml/2006/main" xmlns:r="http://schemas.openxmlformats.org/officeDocument/2006/relationships" xmlns:p="http://schemas.openxmlformats.org/presentationml/2006/main" xmlns:p14="http://schemas.microsoft.com/office/powerpoint/2010/main">
   <p:cSld>
     <p:spTree>
       <p:nvGrpSpPr>
@@ -3329,92 +3325,105 @@
           <a:chExt cx="0" cy="0"/>
         </a:xfrm>
       </p:grpSpPr>
-      <p:sp>
-        <p:nvSpPr>
-          <p:cNvPr id="4" name="직사각형 3">
-            <a:extLst>
-              <a:ext uri="{FF2B5EF4-FFF2-40B4-BE49-F238E27FC236}">
-                <a16:creationId xmlns:a16="http://schemas.microsoft.com/office/drawing/2014/main" id="{119D40DD-2F5B-4FEE-A2F0-59FCF1A6D84E}"/>
-              </a:ext>
-            </a:extLst>
-          </p:cNvPr>
-          <p:cNvSpPr/>
+      <p:grpSp>
+        <p:nvGrpSpPr>
+          <p:cNvPr id="32" name="그룹 8"/>
+          <p:cNvGrpSpPr/>
           <p:nvPr/>
-        </p:nvSpPr>
-        <p:spPr>
-          <a:xfrm>
+        </p:nvGrpSpPr>
+        <p:grpSpPr>
+          <a:xfrm rot="0">
             <a:off x="2341245" y="471170"/>
-            <a:ext cx="4696460" cy="5334000"/>
+            <a:ext cx="4697095" cy="5334635"/>
+            <a:chOff x="2341245" y="471170"/>
+            <a:chExt cx="4697095" cy="5334635"/>
           </a:xfrm>
-          <a:prstGeom prst="rect">
-            <a:avLst/>
-          </a:prstGeom>
-          <a:noFill/>
-        </p:spPr>
-        <p:style>
-          <a:lnRef idx="2">
-            <a:schemeClr val="accent1">
-              <a:shade val="50000"/>
-            </a:schemeClr>
-          </a:lnRef>
-          <a:fillRef idx="1">
-            <a:schemeClr val="accent1"/>
-          </a:fillRef>
-          <a:effectRef idx="0">
-            <a:schemeClr val="accent1"/>
-          </a:effectRef>
-          <a:fontRef idx="minor">
-            <a:schemeClr val="lt1"/>
-          </a:fontRef>
-        </p:style>
-        <p:txBody>
-          <a:bodyPr rtlCol="0" anchor="ctr"/>
-          <a:lstStyle/>
-          <a:p>
-            <a:pPr algn="ctr"/>
-            <a:endParaRPr lang="ko-KR" altLang="en-US"/>
-          </a:p>
-        </p:txBody>
-      </p:sp>
-      <p:sp>
-        <p:nvSpPr>
-          <p:cNvPr id="5" name="TextBox 4">
-            <a:extLst>
-              <a:ext uri="{FF2B5EF4-FFF2-40B4-BE49-F238E27FC236}">
-                <a16:creationId xmlns:a16="http://schemas.microsoft.com/office/drawing/2014/main" id="{49B6E06A-5916-4A46-9CEF-F7F8A9283CE7}"/>
-              </a:ext>
-            </a:extLst>
-          </p:cNvPr>
-          <p:cNvSpPr txBox="1"/>
-          <p:nvPr/>
-        </p:nvSpPr>
-        <p:spPr>
-          <a:xfrm>
-            <a:off x="4071620" y="683895"/>
-            <a:ext cx="1236345" cy="369570"/>
-          </a:xfrm>
-          <a:prstGeom prst="rect">
-            <a:avLst/>
-          </a:prstGeom>
-          <a:noFill/>
-        </p:spPr>
-        <p:txBody>
-          <a:bodyPr wrap="none" rtlCol="0">
-            <a:spAutoFit/>
-          </a:bodyPr>
-          <a:lstStyle/>
-          <a:p>
-            <a:r>
-              <a:rPr lang="en-US" altLang="ko-KR" dirty="0"/>
-              <a:t>Flask </a:t>
-            </a:r>
-            <a:r>
-              <a:rPr lang="ko-KR" altLang="en-US" dirty="0"/>
-              <a:t>서버</a:t>
-            </a:r>
-          </a:p>
-        </p:txBody>
-      </p:sp>
+        </p:grpSpPr>
+        <p:sp>
+          <p:nvSpPr>
+            <p:cNvPr id="4" name="직사각형 3"/>
+            <p:cNvSpPr>
+              <a:spLocks/>
+            </p:cNvSpPr>
+            <p:nvPr/>
+          </p:nvSpPr>
+          <p:spPr>
+            <a:xfrm rot="0">
+              <a:off x="2341245" y="471170"/>
+              <a:ext cx="4697095" cy="5334635"/>
+            </a:xfrm>
+            <a:prstGeom prst="rect"/>
+            <a:noFill/>
+          </p:spPr>
+          <p:style>
+            <a:lnRef idx="2">
+              <a:schemeClr val="accent1">
+                <a:shade val="50000"/>
+              </a:schemeClr>
+            </a:lnRef>
+            <a:fillRef idx="1">
+              <a:schemeClr val="accent1"/>
+            </a:fillRef>
+            <a:effectRef idx="0">
+              <a:schemeClr val="accent1"/>
+            </a:effectRef>
+            <a:fontRef idx="minor">
+              <a:schemeClr val="lt1"/>
+            </a:fontRef>
+          </p:style>
+          <p:txBody>
+            <a:bodyPr wrap="square" lIns="91440" tIns="45720" rIns="91440" bIns="45720" numCol="1" vert="horz" anchor="ctr">
+              <a:noAutofit/>
+            </a:bodyPr>
+            <a:lstStyle/>
+            <a:p>
+              <a:pPr marL="0" indent="0" algn="ctr" latinLnBrk="0">
+                <a:buFontTx/>
+                <a:buNone/>
+              </a:pPr>
+              <a:endParaRPr lang="ko-KR" altLang="en-US"/>
+            </a:p>
+          </p:txBody>
+        </p:sp>
+        <p:sp>
+          <p:nvSpPr>
+            <p:cNvPr id="5" name="TextBox 4"/>
+            <p:cNvSpPr txBox="1">
+              <a:spLocks/>
+            </p:cNvSpPr>
+            <p:nvPr/>
+          </p:nvSpPr>
+          <p:spPr>
+            <a:xfrm rot="0">
+              <a:off x="4071620" y="683895"/>
+              <a:ext cx="1236980" cy="370205"/>
+            </a:xfrm>
+            <a:prstGeom prst="rect"/>
+            <a:noFill/>
+          </p:spPr>
+          <p:txBody>
+            <a:bodyPr wrap="none" lIns="91440" tIns="45720" rIns="91440" bIns="45720" numCol="1" vert="horz" anchor="t">
+              <a:spAutoFit/>
+            </a:bodyPr>
+            <a:lstStyle/>
+            <a:p>
+              <a:pPr marL="0" indent="0" latinLnBrk="0">
+                <a:buFontTx/>
+                <a:buNone/>
+              </a:pPr>
+              <a:r>
+                <a:rPr lang="en-US" altLang="ko-KR"/>
+                <a:t>Flask </a:t>
+              </a:r>
+              <a:r>
+                <a:rPr lang="ko-KR" altLang="en-US"/>
+                <a:t>서버</a:t>
+              </a:r>
+              <a:endParaRPr lang="ko-KR" altLang="en-US"/>
+            </a:p>
+          </p:txBody>
+        </p:sp>
+      </p:grpSp>
       <p:sp>
         <p:nvSpPr>
           <p:cNvPr id="6" name="직사각형 5">
@@ -4101,6 +4110,21 @@
   <p:clrMapOvr>
     <a:masterClrMapping/>
   </p:clrMapOvr>
+  <mc:AlternateContent xmlns:mc="http://schemas.openxmlformats.org/markup-compatibility/2006">
+    <mc:Choice xmlns:p14="http://schemas.microsoft.com/office/powerpoint/2010/main" Requires="p14">
+      <p:transition spd="slow" p14:dur="2000"/>
+    </mc:Choice>
+    <mc:Fallback>
+      <p:transition spd="slow"/>
+    </mc:Fallback>
+  </mc:AlternateContent>
+  <p:timing>
+    <p:tnLst>
+      <p:par>
+        <p:cTn id="1" dur="indefinite" restart="never" nodeType="tmRoot"/>
+      </p:par>
+    </p:tnLst>
+  </p:timing>
 </p:sld>
 </file>
 
@@ -4217,7 +4241,7 @@
 </file>
 
 <file path=ppt/slides/slide3.xml><?xml version="1.0" encoding="utf-8"?>
-<p:sld xmlns:a="http://schemas.openxmlformats.org/drawingml/2006/main" xmlns:r="http://schemas.openxmlformats.org/officeDocument/2006/relationships" xmlns:p="http://schemas.openxmlformats.org/presentationml/2006/main">
+<p:sld xmlns:a="http://schemas.openxmlformats.org/drawingml/2006/main" xmlns:r="http://schemas.openxmlformats.org/officeDocument/2006/relationships" xmlns:p="http://schemas.openxmlformats.org/presentationml/2006/main" xmlns:p14="http://schemas.microsoft.com/office/powerpoint/2010/main">
   <p:cSld>
     <p:spTree>
       <p:nvGrpSpPr>
@@ -4233,569 +4257,484 @@
           <a:chExt cx="0" cy="0"/>
         </a:xfrm>
       </p:grpSpPr>
-      <p:sp>
-        <p:nvSpPr>
-          <p:cNvPr id="4" name="Rect 0"/>
-          <p:cNvSpPr>
-            <a:spLocks/>
-          </p:cNvSpPr>
+      <p:grpSp>
+        <p:nvGrpSpPr>
+          <p:cNvPr id="44" name="그룹 11"/>
+          <p:cNvGrpSpPr/>
           <p:nvPr/>
-        </p:nvSpPr>
-        <p:spPr>
-          <a:xfrm>
-            <a:off x="2341245" y="471170"/>
-            <a:ext cx="4697095" cy="5334635"/>
+        </p:nvGrpSpPr>
+        <p:grpSpPr>
+          <a:xfrm rot="0">
+            <a:off x="2339340" y="468630"/>
+            <a:ext cx="4735195" cy="4249420"/>
+            <a:chOff x="2339340" y="468630"/>
+            <a:chExt cx="4735195" cy="4249420"/>
           </a:xfrm>
-          <a:prstGeom prst="rect">
-            <a:avLst/>
-          </a:prstGeom>
-          <a:noFill/>
-        </p:spPr>
-        <p:style>
-          <a:lnRef idx="2">
-            <a:schemeClr val="accent1">
-              <a:shade val="50000"/>
-            </a:schemeClr>
-          </a:lnRef>
-          <a:fillRef idx="1">
-            <a:schemeClr val="accent1"/>
-          </a:fillRef>
-          <a:effectRef idx="0">
-            <a:schemeClr val="accent1"/>
-          </a:effectRef>
-          <a:fontRef idx="minor">
-            <a:schemeClr val="lt1"/>
-          </a:fontRef>
-        </p:style>
-        <p:txBody>
-          <a:bodyPr vert="horz" wrap="square" lIns="91440" tIns="45720" rIns="91440" bIns="45720" numCol="1" anchor="ctr">
-            <a:noAutofit/>
-          </a:bodyPr>
-          <a:lstStyle/>
-          <a:p>
-            <a:pPr marL="0" indent="0" algn="ctr" latinLnBrk="0">
-              <a:buFontTx/>
-              <a:buNone/>
-            </a:pPr>
-            <a:endParaRPr lang="ko-KR" altLang="en-US"/>
-          </a:p>
-        </p:txBody>
-      </p:sp>
-      <p:sp>
-        <p:nvSpPr>
-          <p:cNvPr id="5" name="Rect 0"/>
-          <p:cNvSpPr txBox="1">
-            <a:spLocks/>
-          </p:cNvSpPr>
+        </p:grpSpPr>
+        <p:sp>
+          <p:nvSpPr>
+            <p:cNvPr id="4" name="Rect 0"/>
+            <p:cNvSpPr>
+              <a:spLocks/>
+            </p:cNvSpPr>
+            <p:nvPr/>
+          </p:nvSpPr>
+          <p:spPr>
+            <a:xfrm>
+              <a:off x="2339340" y="468630"/>
+              <a:ext cx="4735195" cy="4249420"/>
+            </a:xfrm>
+            <a:prstGeom prst="rect">
+              <a:avLst/>
+            </a:prstGeom>
+            <a:noFill/>
+          </p:spPr>
+          <p:style>
+            <a:lnRef idx="2">
+              <a:schemeClr val="accent1">
+                <a:shade val="50000"/>
+              </a:schemeClr>
+            </a:lnRef>
+            <a:fillRef idx="1">
+              <a:schemeClr val="accent1"/>
+            </a:fillRef>
+            <a:effectRef idx="0">
+              <a:schemeClr val="accent1"/>
+            </a:effectRef>
+            <a:fontRef idx="minor">
+              <a:schemeClr val="lt1"/>
+            </a:fontRef>
+          </p:style>
+          <p:txBody>
+            <a:bodyPr wrap="square" lIns="91440" tIns="45720" rIns="91440" bIns="45720" numCol="1" vert="horz" anchor="ctr">
+              <a:noAutofit/>
+            </a:bodyPr>
+            <a:lstStyle/>
+            <a:p>
+              <a:pPr marL="0" indent="0" algn="ctr" latinLnBrk="0">
+                <a:buFontTx/>
+                <a:buNone/>
+              </a:pPr>
+              <a:endParaRPr lang="ko-KR" altLang="en-US"/>
+            </a:p>
+          </p:txBody>
+        </p:sp>
+        <p:sp>
+          <p:nvSpPr>
+            <p:cNvPr id="5" name="Rect 0"/>
+            <p:cNvSpPr txBox="1">
+              <a:spLocks/>
+            </p:cNvSpPr>
+            <p:nvPr/>
+          </p:nvSpPr>
+          <p:spPr>
+            <a:xfrm>
+              <a:off x="4084955" y="615950"/>
+              <a:ext cx="1246505" cy="257175"/>
+            </a:xfrm>
+            <a:prstGeom prst="rect">
+              <a:avLst/>
+            </a:prstGeom>
+            <a:noFill/>
+          </p:spPr>
+          <p:txBody>
+            <a:bodyPr vert="horz" wrap="none" lIns="91440" tIns="45720" rIns="91440" bIns="45720" numCol="1" anchor="t">
+              <a:spAutoFit/>
+            </a:bodyPr>
+            <a:lstStyle/>
+            <a:p>
+              <a:pPr marL="0" indent="0" latinLnBrk="0">
+                <a:buFontTx/>
+                <a:buNone/>
+              </a:pPr>
+              <a:r>
+                <a:rPr lang="en-US" altLang="ko-KR"/>
+                <a:t>Flask </a:t>
+              </a:r>
+              <a:r>
+                <a:rPr lang="ko-KR" altLang="en-US"/>
+                <a:t>서버</a:t>
+              </a:r>
+            </a:p>
+          </p:txBody>
+        </p:sp>
+      </p:grpSp>
+      <p:grpSp>
+        <p:nvGrpSpPr>
+          <p:cNvPr id="43" name="그룹 10"/>
+          <p:cNvGrpSpPr/>
           <p:nvPr/>
-        </p:nvSpPr>
-        <p:spPr>
-          <a:xfrm>
-            <a:off x="4071620" y="683895"/>
-            <a:ext cx="1236980" cy="370205"/>
+        </p:nvGrpSpPr>
+        <p:grpSpPr>
+          <a:xfrm rot="0">
+            <a:off x="247015" y="458470"/>
+            <a:ext cx="1525270" cy="4260850"/>
+            <a:chOff x="247015" y="458470"/>
+            <a:chExt cx="1525270" cy="4260850"/>
           </a:xfrm>
-          <a:prstGeom prst="rect">
-            <a:avLst/>
-          </a:prstGeom>
-          <a:noFill/>
-        </p:spPr>
-        <p:txBody>
-          <a:bodyPr vert="horz" wrap="none" lIns="91440" tIns="45720" rIns="91440" bIns="45720" numCol="1" anchor="t">
-            <a:spAutoFit/>
-          </a:bodyPr>
-          <a:lstStyle/>
-          <a:p>
-            <a:pPr marL="0" indent="0" latinLnBrk="0">
-              <a:buFontTx/>
-              <a:buNone/>
-            </a:pPr>
-            <a:r>
-              <a:rPr lang="en-US" altLang="ko-KR"/>
-              <a:t>Flask </a:t>
-            </a:r>
-            <a:r>
-              <a:rPr lang="ko-KR" altLang="en-US"/>
-              <a:t>서버</a:t>
-            </a:r>
-          </a:p>
-        </p:txBody>
-      </p:sp>
-      <p:sp>
-        <p:nvSpPr>
-          <p:cNvPr id="6" name="Rect 0"/>
-          <p:cNvSpPr>
-            <a:spLocks/>
-          </p:cNvSpPr>
+        </p:grpSpPr>
+        <p:sp>
+          <p:nvSpPr>
+            <p:cNvPr id="12" name="Rect 0"/>
+            <p:cNvSpPr>
+              <a:spLocks/>
+            </p:cNvSpPr>
+            <p:nvPr/>
+          </p:nvSpPr>
+          <p:spPr>
+            <a:xfrm>
+              <a:off x="247015" y="458470"/>
+              <a:ext cx="1524635" cy="4260215"/>
+            </a:xfrm>
+            <a:prstGeom prst="rect">
+              <a:avLst/>
+            </a:prstGeom>
+            <a:noFill/>
+          </p:spPr>
+          <p:style>
+            <a:lnRef idx="2">
+              <a:schemeClr val="accent1">
+                <a:shade val="50000"/>
+              </a:schemeClr>
+            </a:lnRef>
+            <a:fillRef idx="1">
+              <a:schemeClr val="accent1"/>
+            </a:fillRef>
+            <a:effectRef idx="0">
+              <a:schemeClr val="accent1"/>
+            </a:effectRef>
+            <a:fontRef idx="minor">
+              <a:schemeClr val="lt1"/>
+            </a:fontRef>
+          </p:style>
+          <p:txBody>
+            <a:bodyPr vert="horz" wrap="square" lIns="91440" tIns="45720" rIns="91440" bIns="45720" numCol="1" anchor="ctr">
+              <a:noAutofit/>
+            </a:bodyPr>
+            <a:lstStyle/>
+            <a:p>
+              <a:pPr marL="0" indent="0" algn="ctr" latinLnBrk="0">
+                <a:buFontTx/>
+                <a:buNone/>
+              </a:pPr>
+              <a:endParaRPr lang="ko-KR" altLang="en-US"/>
+            </a:p>
+          </p:txBody>
+        </p:sp>
+        <p:sp>
+          <p:nvSpPr>
+            <p:cNvPr id="13" name="Rect 0"/>
+            <p:cNvSpPr txBox="1">
+              <a:spLocks/>
+            </p:cNvSpPr>
+            <p:nvPr/>
+          </p:nvSpPr>
+          <p:spPr>
+            <a:xfrm>
+              <a:off x="610870" y="536575"/>
+              <a:ext cx="772795" cy="669290"/>
+            </a:xfrm>
+            <a:prstGeom prst="rect">
+              <a:avLst/>
+            </a:prstGeom>
+            <a:noFill/>
+          </p:spPr>
+          <p:txBody>
+            <a:bodyPr wrap="none" lIns="91440" tIns="45720" rIns="91440" bIns="45720" numCol="1" vert="horz" anchor="t">
+              <a:spAutoFit/>
+            </a:bodyPr>
+            <a:lstStyle/>
+            <a:p>
+              <a:pPr marL="0" indent="0" latinLnBrk="0">
+                <a:buFontTx/>
+                <a:buNone/>
+              </a:pPr>
+              <a:r>
+                <a:rPr lang="ko-KR" altLang="ko-KR"/>
+                <a:t>C</a:t>
+              </a:r>
+              <a:r>
+                <a:rPr lang="en-US" altLang="ko-KR"/>
+                <a:t>lient</a:t>
+              </a:r>
+              <a:endParaRPr lang="ko-KR" altLang="en-US"/>
+            </a:p>
+          </p:txBody>
+        </p:sp>
+      </p:grpSp>
+      <p:grpSp>
+        <p:nvGrpSpPr>
+          <p:cNvPr id="48" name="그룹 15"/>
+          <p:cNvGrpSpPr/>
           <p:nvPr/>
-        </p:nvSpPr>
-        <p:spPr>
-          <a:xfrm>
-            <a:off x="8215630" y="946785"/>
-            <a:ext cx="1635760" cy="2988945"/>
+        </p:nvGrpSpPr>
+        <p:grpSpPr>
+          <a:xfrm rot="0">
+            <a:off x="1771650" y="3293745"/>
+            <a:ext cx="570865" cy="443230"/>
+            <a:chOff x="1771650" y="3293745"/>
+            <a:chExt cx="570865" cy="443230"/>
           </a:xfrm>
-          <a:prstGeom prst="rect">
-            <a:avLst/>
-          </a:prstGeom>
-          <a:noFill/>
-        </p:spPr>
-        <p:style>
-          <a:lnRef idx="2">
-            <a:schemeClr val="accent1">
-              <a:shade val="50000"/>
-            </a:schemeClr>
-          </a:lnRef>
-          <a:fillRef idx="1">
-            <a:schemeClr val="accent1"/>
-          </a:fillRef>
-          <a:effectRef idx="0">
-            <a:schemeClr val="accent1"/>
-          </a:effectRef>
-          <a:fontRef idx="minor">
-            <a:schemeClr val="lt1"/>
-          </a:fontRef>
-        </p:style>
-        <p:txBody>
-          <a:bodyPr vert="horz" wrap="square" lIns="91440" tIns="45720" rIns="91440" bIns="45720" numCol="1" anchor="ctr">
-            <a:noAutofit/>
-          </a:bodyPr>
-          <a:lstStyle/>
-          <a:p>
-            <a:pPr marL="0" indent="0" algn="ctr" latinLnBrk="0">
-              <a:buFontTx/>
-              <a:buNone/>
-            </a:pPr>
-            <a:endParaRPr lang="ko-KR" altLang="en-US"/>
-          </a:p>
-        </p:txBody>
-      </p:sp>
-      <p:sp>
-        <p:nvSpPr>
-          <p:cNvPr id="7" name="Rect 0"/>
-          <p:cNvSpPr txBox="1">
-            <a:spLocks/>
-          </p:cNvSpPr>
+        </p:grpSpPr>
+        <p:cxnSp>
+          <p:nvCxnSpPr>
+            <p:cNvPr id="14" name="Rect 0"/>
+            <p:cNvCxnSpPr/>
+            <p:nvPr/>
+          </p:nvCxnSpPr>
+          <p:spPr>
+            <a:xfrm rot="0">
+              <a:off x="1771650" y="3293745"/>
+              <a:ext cx="570865" cy="1270"/>
+            </a:xfrm>
+            <a:prstGeom prst="straightConnector1"/>
+            <a:ln w="6350" cap="flat" cmpd="sng">
+              <a:prstDash/>
+              <a:tailEnd type="triangle" w="med" len="med"/>
+            </a:ln>
+          </p:spPr>
+          <p:style>
+            <a:lnRef idx="1">
+              <a:schemeClr val="accent1"/>
+            </a:lnRef>
+            <a:fillRef idx="0">
+              <a:schemeClr val="accent1"/>
+            </a:fillRef>
+            <a:effectRef idx="0">
+              <a:schemeClr val="accent1"/>
+            </a:effectRef>
+            <a:fontRef idx="minor">
+              <a:schemeClr val="tx1"/>
+            </a:fontRef>
+          </p:style>
+        </p:cxnSp>
+        <p:cxnSp>
+          <p:nvCxnSpPr>
+            <p:cNvPr id="15" name="Rect 0"/>
+            <p:cNvCxnSpPr/>
+            <p:nvPr/>
+          </p:nvCxnSpPr>
+          <p:spPr>
+            <a:xfrm rot="0">
+              <a:off x="1771650" y="3735705"/>
+              <a:ext cx="570865" cy="1270"/>
+            </a:xfrm>
+            <a:prstGeom prst="straightConnector1"/>
+            <a:ln w="6350" cap="flat" cmpd="sng">
+              <a:prstDash/>
+              <a:headEnd type="triangle" w="med" len="med"/>
+            </a:ln>
+          </p:spPr>
+          <p:style>
+            <a:lnRef idx="1">
+              <a:schemeClr val="accent1"/>
+            </a:lnRef>
+            <a:fillRef idx="0">
+              <a:schemeClr val="accent1"/>
+            </a:fillRef>
+            <a:effectRef idx="0">
+              <a:schemeClr val="accent1"/>
+            </a:effectRef>
+            <a:fontRef idx="minor">
+              <a:schemeClr val="tx1"/>
+            </a:fontRef>
+          </p:style>
+        </p:cxnSp>
+      </p:grpSp>
+      <p:grpSp>
+        <p:nvGrpSpPr>
+          <p:cNvPr id="45" name="그룹 12"/>
+          <p:cNvGrpSpPr/>
           <p:nvPr/>
-        </p:nvSpPr>
-        <p:spPr>
-          <a:xfrm>
-            <a:off x="8070850" y="471170"/>
-            <a:ext cx="1925320" cy="370205"/>
+        </p:nvGrpSpPr>
+        <p:grpSpPr>
+          <a:xfrm rot="0">
+            <a:off x="8215630" y="5177155"/>
+            <a:ext cx="1636395" cy="1437005"/>
+            <a:chOff x="8215630" y="5177155"/>
+            <a:chExt cx="1636395" cy="1437005"/>
           </a:xfrm>
-          <a:prstGeom prst="rect">
-            <a:avLst/>
-          </a:prstGeom>
-          <a:noFill/>
-        </p:spPr>
-        <p:txBody>
-          <a:bodyPr vert="horz" wrap="none" lIns="91440" tIns="45720" rIns="91440" bIns="45720" numCol="1" anchor="t">
-            <a:spAutoFit/>
-          </a:bodyPr>
-          <a:lstStyle/>
-          <a:p>
-            <a:pPr marL="0" indent="0" latinLnBrk="0">
-              <a:buFontTx/>
-              <a:buNone/>
-            </a:pPr>
-            <a:r>
-              <a:rPr lang="en-US" altLang="ko-KR"/>
-              <a:t>Kakao api server</a:t>
-            </a:r>
-            <a:endParaRPr lang="ko-KR" altLang="en-US"/>
-          </a:p>
-        </p:txBody>
-      </p:sp>
-      <p:cxnSp>
-        <p:nvCxnSpPr>
-          <p:cNvPr id="9" name="Rect 0"/>
-          <p:cNvCxnSpPr/>
+        </p:grpSpPr>
+        <p:sp>
+          <p:nvSpPr>
+            <p:cNvPr id="20" name="Rect 0"/>
+            <p:cNvSpPr>
+              <a:spLocks/>
+            </p:cNvSpPr>
+            <p:nvPr/>
+          </p:nvSpPr>
+          <p:spPr>
+            <a:xfrm rot="0">
+              <a:off x="8215630" y="5177155"/>
+              <a:ext cx="1636395" cy="1437005"/>
+            </a:xfrm>
+            <a:prstGeom prst="rect"/>
+            <a:noFill/>
+          </p:spPr>
+          <p:style>
+            <a:lnRef idx="2">
+              <a:schemeClr val="accent1">
+                <a:shade val="50000"/>
+              </a:schemeClr>
+            </a:lnRef>
+            <a:fillRef idx="1">
+              <a:schemeClr val="accent1"/>
+            </a:fillRef>
+            <a:effectRef idx="0">
+              <a:schemeClr val="accent1"/>
+            </a:effectRef>
+            <a:fontRef idx="minor">
+              <a:schemeClr val="lt1"/>
+            </a:fontRef>
+          </p:style>
+          <p:txBody>
+            <a:bodyPr wrap="square" lIns="91440" tIns="45720" rIns="91440" bIns="45720" numCol="1" vert="horz" anchor="ctr">
+              <a:noAutofit/>
+            </a:bodyPr>
+            <a:lstStyle/>
+            <a:p>
+              <a:pPr marL="0" indent="0" algn="ctr" latinLnBrk="0">
+                <a:buFontTx/>
+                <a:buNone/>
+              </a:pPr>
+              <a:endParaRPr lang="ko-KR" altLang="en-US"/>
+            </a:p>
+          </p:txBody>
+        </p:sp>
+        <p:sp>
+          <p:nvSpPr>
+            <p:cNvPr id="21" name="Rect 0"/>
+            <p:cNvSpPr txBox="1">
+              <a:spLocks/>
+            </p:cNvSpPr>
+            <p:nvPr/>
+          </p:nvSpPr>
+          <p:spPr>
+            <a:xfrm rot="0">
+              <a:off x="8634730" y="5177155"/>
+              <a:ext cx="798195" cy="370840"/>
+            </a:xfrm>
+            <a:prstGeom prst="rect"/>
+            <a:noFill/>
+          </p:spPr>
+          <p:txBody>
+            <a:bodyPr wrap="none" lIns="91440" tIns="45720" rIns="91440" bIns="45720" numCol="1" vert="horz" anchor="t">
+              <a:spAutoFit/>
+            </a:bodyPr>
+            <a:lstStyle/>
+            <a:p>
+              <a:pPr marL="0" indent="0" latinLnBrk="0">
+                <a:buFontTx/>
+                <a:buNone/>
+              </a:pPr>
+              <a:r>
+                <a:rPr lang="en-US" altLang="ko-KR"/>
+                <a:t>mysql</a:t>
+              </a:r>
+              <a:endParaRPr lang="ko-KR" altLang="en-US"/>
+            </a:p>
+          </p:txBody>
+        </p:sp>
+      </p:grpSp>
+      <p:grpSp>
+        <p:nvGrpSpPr>
+          <p:cNvPr id="50" name="그룹 17"/>
+          <p:cNvGrpSpPr/>
           <p:nvPr/>
-        </p:nvCxnSpPr>
-        <p:spPr>
-          <a:xfrm>
-            <a:off x="7051675" y="1944370"/>
-            <a:ext cx="1164590" cy="635"/>
+        </p:nvGrpSpPr>
+        <p:grpSpPr>
+          <a:xfrm rot="0">
+            <a:off x="8039100" y="1095375"/>
+            <a:ext cx="1986915" cy="3439160"/>
+            <a:chOff x="8039100" y="1095375"/>
+            <a:chExt cx="1986915" cy="3439160"/>
           </a:xfrm>
-          <a:prstGeom prst="straightConnector1">
-            <a:avLst/>
-          </a:prstGeom>
-          <a:ln w="6350" cap="flat" cmpd="sng">
-            <a:prstDash/>
-            <a:tailEnd type="triangle" w="med" len="med"/>
-          </a:ln>
-        </p:spPr>
-        <p:style>
-          <a:lnRef idx="1">
-            <a:schemeClr val="accent1"/>
-          </a:lnRef>
-          <a:fillRef idx="0">
-            <a:schemeClr val="accent1"/>
-          </a:fillRef>
-          <a:effectRef idx="0">
-            <a:schemeClr val="accent1"/>
-          </a:effectRef>
-          <a:fontRef idx="minor">
-            <a:schemeClr val="tx1"/>
-          </a:fontRef>
-        </p:style>
-      </p:cxnSp>
-      <p:cxnSp>
-        <p:nvCxnSpPr>
-          <p:cNvPr id="10" name="Rect 0"/>
-          <p:cNvCxnSpPr/>
-          <p:nvPr/>
-        </p:nvCxnSpPr>
-        <p:spPr>
-          <a:xfrm>
-            <a:off x="7051675" y="3537585"/>
-            <a:ext cx="1164590" cy="635"/>
-          </a:xfrm>
-          <a:prstGeom prst="straightConnector1">
-            <a:avLst/>
-          </a:prstGeom>
-          <a:ln w="6350" cap="flat" cmpd="sng">
-            <a:prstDash/>
-            <a:headEnd type="triangle" w="med" len="med"/>
-          </a:ln>
-        </p:spPr>
-        <p:style>
-          <a:lnRef idx="1">
-            <a:schemeClr val="accent1"/>
-          </a:lnRef>
-          <a:fillRef idx="0">
-            <a:schemeClr val="accent1"/>
-          </a:fillRef>
-          <a:effectRef idx="0">
-            <a:schemeClr val="accent1"/>
-          </a:effectRef>
-          <a:fontRef idx="minor">
-            <a:schemeClr val="tx1"/>
-          </a:fontRef>
-        </p:style>
-      </p:cxnSp>
-      <p:sp>
-        <p:nvSpPr>
-          <p:cNvPr id="12" name="Rect 0"/>
-          <p:cNvSpPr>
-            <a:spLocks/>
-          </p:cNvSpPr>
-          <p:nvPr/>
-        </p:nvSpPr>
-        <p:spPr>
-          <a:xfrm>
-            <a:off x="247650" y="471170"/>
-            <a:ext cx="1524635" cy="3486785"/>
-          </a:xfrm>
-          <a:prstGeom prst="rect">
-            <a:avLst/>
-          </a:prstGeom>
-          <a:noFill/>
-        </p:spPr>
-        <p:style>
-          <a:lnRef idx="2">
-            <a:schemeClr val="accent1">
-              <a:shade val="50000"/>
-            </a:schemeClr>
-          </a:lnRef>
-          <a:fillRef idx="1">
-            <a:schemeClr val="accent1"/>
-          </a:fillRef>
-          <a:effectRef idx="0">
-            <a:schemeClr val="accent1"/>
-          </a:effectRef>
-          <a:fontRef idx="minor">
-            <a:schemeClr val="lt1"/>
-          </a:fontRef>
-        </p:style>
-        <p:txBody>
-          <a:bodyPr vert="horz" wrap="square" lIns="91440" tIns="45720" rIns="91440" bIns="45720" numCol="1" anchor="ctr">
-            <a:noAutofit/>
-          </a:bodyPr>
-          <a:lstStyle/>
-          <a:p>
-            <a:pPr marL="0" indent="0" algn="ctr" latinLnBrk="0">
-              <a:buFontTx/>
-              <a:buNone/>
-            </a:pPr>
-            <a:endParaRPr lang="ko-KR" altLang="en-US"/>
-          </a:p>
-        </p:txBody>
-      </p:sp>
-      <p:sp>
-        <p:nvSpPr>
-          <p:cNvPr id="13" name="Rect 0"/>
-          <p:cNvSpPr txBox="1">
-            <a:spLocks/>
-          </p:cNvSpPr>
-          <p:nvPr/>
-        </p:nvSpPr>
-        <p:spPr>
-          <a:xfrm>
-            <a:off x="575945" y="683895"/>
-            <a:ext cx="742950" cy="370205"/>
-          </a:xfrm>
-          <a:prstGeom prst="rect">
-            <a:avLst/>
-          </a:prstGeom>
-          <a:noFill/>
-        </p:spPr>
-        <p:txBody>
-          <a:bodyPr vert="horz" wrap="none" lIns="91440" tIns="45720" rIns="91440" bIns="45720" numCol="1" anchor="t">
-            <a:spAutoFit/>
-          </a:bodyPr>
-          <a:lstStyle/>
-          <a:p>
-            <a:pPr marL="0" indent="0" latinLnBrk="0">
-              <a:buFontTx/>
-              <a:buNone/>
-            </a:pPr>
-            <a:r>
-              <a:rPr lang="en-US" altLang="ko-KR"/>
-              <a:t>client</a:t>
-            </a:r>
-            <a:endParaRPr lang="ko-KR" altLang="en-US"/>
-          </a:p>
-        </p:txBody>
-      </p:sp>
-      <p:cxnSp>
-        <p:nvCxnSpPr>
-          <p:cNvPr id="14" name="Rect 0"/>
-          <p:cNvCxnSpPr/>
-          <p:nvPr/>
-        </p:nvCxnSpPr>
-        <p:spPr>
-          <a:xfrm>
-            <a:off x="1771650" y="2341245"/>
-            <a:ext cx="570230" cy="635"/>
-          </a:xfrm>
-          <a:prstGeom prst="straightConnector1">
-            <a:avLst/>
-          </a:prstGeom>
-          <a:ln w="6350" cap="flat" cmpd="sng">
-            <a:prstDash/>
-            <a:tailEnd type="triangle" w="med" len="med"/>
-          </a:ln>
-        </p:spPr>
-        <p:style>
-          <a:lnRef idx="1">
-            <a:schemeClr val="accent1"/>
-          </a:lnRef>
-          <a:fillRef idx="0">
-            <a:schemeClr val="accent1"/>
-          </a:fillRef>
-          <a:effectRef idx="0">
-            <a:schemeClr val="accent1"/>
-          </a:effectRef>
-          <a:fontRef idx="minor">
-            <a:schemeClr val="tx1"/>
-          </a:fontRef>
-        </p:style>
-      </p:cxnSp>
-      <p:cxnSp>
-        <p:nvCxnSpPr>
-          <p:cNvPr id="15" name="Rect 0"/>
-          <p:cNvCxnSpPr/>
-          <p:nvPr/>
-        </p:nvCxnSpPr>
-        <p:spPr>
-          <a:xfrm>
-            <a:off x="1762760" y="2964815"/>
-            <a:ext cx="570230" cy="635"/>
-          </a:xfrm>
-          <a:prstGeom prst="straightConnector1">
-            <a:avLst/>
-          </a:prstGeom>
-          <a:ln w="6350" cap="flat" cmpd="sng">
-            <a:prstDash/>
-            <a:headEnd type="triangle" w="med" len="med"/>
-          </a:ln>
-        </p:spPr>
-        <p:style>
-          <a:lnRef idx="1">
-            <a:schemeClr val="accent1"/>
-          </a:lnRef>
-          <a:fillRef idx="0">
-            <a:schemeClr val="accent1"/>
-          </a:fillRef>
-          <a:effectRef idx="0">
-            <a:schemeClr val="accent1"/>
-          </a:effectRef>
-          <a:fontRef idx="minor">
-            <a:schemeClr val="tx1"/>
-          </a:fontRef>
-        </p:style>
-      </p:cxnSp>
-      <p:sp>
-        <p:nvSpPr>
-          <p:cNvPr id="20" name="Rect 0"/>
-          <p:cNvSpPr>
-            <a:spLocks/>
-          </p:cNvSpPr>
-          <p:nvPr/>
-        </p:nvSpPr>
-        <p:spPr>
-          <a:xfrm>
-            <a:off x="8215630" y="4476115"/>
-            <a:ext cx="1635760" cy="1436370"/>
-          </a:xfrm>
-          <a:prstGeom prst="rect">
-            <a:avLst/>
-          </a:prstGeom>
-          <a:noFill/>
-        </p:spPr>
-        <p:style>
-          <a:lnRef idx="2">
-            <a:schemeClr val="accent1">
-              <a:shade val="50000"/>
-            </a:schemeClr>
-          </a:lnRef>
-          <a:fillRef idx="1">
-            <a:schemeClr val="accent1"/>
-          </a:fillRef>
-          <a:effectRef idx="0">
-            <a:schemeClr val="accent1"/>
-          </a:effectRef>
-          <a:fontRef idx="minor">
-            <a:schemeClr val="lt1"/>
-          </a:fontRef>
-        </p:style>
-        <p:txBody>
-          <a:bodyPr vert="horz" wrap="square" lIns="91440" tIns="45720" rIns="91440" bIns="45720" numCol="1" anchor="ctr">
-            <a:noAutofit/>
-          </a:bodyPr>
-          <a:lstStyle/>
-          <a:p>
-            <a:pPr marL="0" indent="0" algn="ctr" latinLnBrk="0">
-              <a:buFontTx/>
-              <a:buNone/>
-            </a:pPr>
-            <a:endParaRPr lang="ko-KR" altLang="en-US"/>
-          </a:p>
-        </p:txBody>
-      </p:sp>
-      <p:sp>
-        <p:nvSpPr>
-          <p:cNvPr id="21" name="Rect 0"/>
-          <p:cNvSpPr txBox="1">
-            <a:spLocks/>
-          </p:cNvSpPr>
-          <p:nvPr/>
-        </p:nvSpPr>
-        <p:spPr>
-          <a:xfrm>
-            <a:off x="8634730" y="4112260"/>
-            <a:ext cx="797560" cy="370205"/>
-          </a:xfrm>
-          <a:prstGeom prst="rect">
-            <a:avLst/>
-          </a:prstGeom>
-          <a:noFill/>
-        </p:spPr>
-        <p:txBody>
-          <a:bodyPr vert="horz" wrap="none" lIns="91440" tIns="45720" rIns="91440" bIns="45720" numCol="1" anchor="t">
-            <a:spAutoFit/>
-          </a:bodyPr>
-          <a:lstStyle/>
-          <a:p>
-            <a:pPr marL="0" indent="0" latinLnBrk="0">
-              <a:buFontTx/>
-              <a:buNone/>
-            </a:pPr>
-            <a:r>
-              <a:rPr lang="en-US" altLang="ko-KR"/>
-              <a:t>mysql</a:t>
-            </a:r>
-            <a:endParaRPr lang="ko-KR" altLang="en-US"/>
-          </a:p>
-        </p:txBody>
-      </p:sp>
-      <p:sp>
-        <p:nvSpPr>
-          <p:cNvPr id="22" name="Rect 0"/>
-          <p:cNvSpPr>
-            <a:spLocks/>
-          </p:cNvSpPr>
-          <p:nvPr/>
-        </p:nvSpPr>
-        <p:spPr>
-          <a:xfrm>
-            <a:off x="10643235" y="1934845"/>
-            <a:ext cx="1635760" cy="2988945"/>
-          </a:xfrm>
-          <a:prstGeom prst="rect">
-            <a:avLst/>
-          </a:prstGeom>
-          <a:noFill/>
-        </p:spPr>
-        <p:style>
-          <a:lnRef idx="2">
-            <a:schemeClr val="accent1">
-              <a:shade val="50000"/>
-            </a:schemeClr>
-          </a:lnRef>
-          <a:fillRef idx="1">
-            <a:schemeClr val="accent1"/>
-          </a:fillRef>
-          <a:effectRef idx="0">
-            <a:schemeClr val="accent1"/>
-          </a:effectRef>
-          <a:fontRef idx="minor">
-            <a:schemeClr val="lt1"/>
-          </a:fontRef>
-        </p:style>
-        <p:txBody>
-          <a:bodyPr vert="horz" wrap="square" lIns="91440" tIns="45720" rIns="91440" bIns="45720" numCol="1" anchor="ctr">
-            <a:noAutofit/>
-          </a:bodyPr>
-          <a:lstStyle/>
-          <a:p>
-            <a:pPr marL="0" indent="0" algn="ctr" latinLnBrk="0">
-              <a:buFontTx/>
-              <a:buNone/>
-            </a:pPr>
-            <a:endParaRPr lang="ko-KR" altLang="en-US"/>
-          </a:p>
-        </p:txBody>
-      </p:sp>
-      <p:sp>
-        <p:nvSpPr>
-          <p:cNvPr id="23" name="Rect 0"/>
-          <p:cNvSpPr txBox="1">
-            <a:spLocks/>
-          </p:cNvSpPr>
-          <p:nvPr/>
-        </p:nvSpPr>
-        <p:spPr>
-          <a:xfrm>
-            <a:off x="10498455" y="1459230"/>
-            <a:ext cx="1986280" cy="370205"/>
-          </a:xfrm>
-          <a:prstGeom prst="rect">
-            <a:avLst/>
-          </a:prstGeom>
-          <a:noFill/>
-        </p:spPr>
-        <p:txBody>
-          <a:bodyPr vert="horz" wrap="none" lIns="91440" tIns="45720" rIns="91440" bIns="45720" numCol="1" anchor="t">
-            <a:spAutoFit/>
-          </a:bodyPr>
-          <a:lstStyle/>
-          <a:p>
-            <a:pPr marL="0" indent="0" latinLnBrk="0">
-              <a:buFontTx/>
-              <a:buNone/>
-            </a:pPr>
-            <a:r>
-              <a:rPr lang="ko-KR" altLang="en-US"/>
-              <a:t>기상청 </a:t>
-            </a:r>
-            <a:r>
-              <a:rPr lang="en-US" altLang="ko-KR"/>
-              <a:t>api server</a:t>
-            </a:r>
-            <a:endParaRPr lang="ko-KR" altLang="en-US"/>
-          </a:p>
-        </p:txBody>
-      </p:sp>
+        </p:grpSpPr>
+        <p:sp>
+          <p:nvSpPr>
+            <p:cNvPr id="22" name="Rect 0"/>
+            <p:cNvSpPr>
+              <a:spLocks/>
+            </p:cNvSpPr>
+            <p:nvPr/>
+          </p:nvSpPr>
+          <p:spPr>
+            <a:xfrm rot="0">
+              <a:off x="8209915" y="1544955"/>
+              <a:ext cx="1636395" cy="2989580"/>
+            </a:xfrm>
+            <a:prstGeom prst="rect"/>
+            <a:noFill/>
+          </p:spPr>
+          <p:style>
+            <a:lnRef idx="2">
+              <a:schemeClr val="accent1">
+                <a:shade val="50000"/>
+              </a:schemeClr>
+            </a:lnRef>
+            <a:fillRef idx="1">
+              <a:schemeClr val="accent1"/>
+            </a:fillRef>
+            <a:effectRef idx="0">
+              <a:schemeClr val="accent1"/>
+            </a:effectRef>
+            <a:fontRef idx="minor">
+              <a:schemeClr val="lt1"/>
+            </a:fontRef>
+          </p:style>
+          <p:txBody>
+            <a:bodyPr wrap="square" lIns="91440" tIns="45720" rIns="91440" bIns="45720" numCol="1" vert="horz" anchor="ctr">
+              <a:noAutofit/>
+            </a:bodyPr>
+            <a:lstStyle/>
+            <a:p>
+              <a:pPr marL="0" indent="0" algn="ctr" latinLnBrk="0">
+                <a:buFontTx/>
+                <a:buNone/>
+              </a:pPr>
+              <a:endParaRPr lang="ko-KR" altLang="en-US"/>
+            </a:p>
+          </p:txBody>
+        </p:sp>
+        <p:sp>
+          <p:nvSpPr>
+            <p:cNvPr id="23" name="Rect 0"/>
+            <p:cNvSpPr txBox="1">
+              <a:spLocks/>
+            </p:cNvSpPr>
+            <p:nvPr/>
+          </p:nvSpPr>
+          <p:spPr>
+            <a:xfrm rot="0">
+              <a:off x="8039100" y="1095375"/>
+              <a:ext cx="1986915" cy="370840"/>
+            </a:xfrm>
+            <a:prstGeom prst="rect"/>
+            <a:noFill/>
+          </p:spPr>
+          <p:txBody>
+            <a:bodyPr wrap="none" lIns="91440" tIns="45720" rIns="91440" bIns="45720" numCol="1" vert="horz" anchor="t">
+              <a:spAutoFit/>
+            </a:bodyPr>
+            <a:lstStyle/>
+            <a:p>
+              <a:pPr marL="0" indent="0" latinLnBrk="0">
+                <a:buFontTx/>
+                <a:buNone/>
+              </a:pPr>
+              <a:r>
+                <a:rPr lang="ko-KR" altLang="en-US"/>
+                <a:t>기상청 </a:t>
+              </a:r>
+              <a:r>
+                <a:rPr lang="en-US" altLang="ko-KR"/>
+                <a:t>api server</a:t>
+              </a:r>
+              <a:endParaRPr lang="ko-KR" altLang="en-US"/>
+            </a:p>
+          </p:txBody>
+        </p:sp>
+      </p:grpSp>
       <p:cxnSp>
         <p:nvCxnSpPr>
           <p:cNvPr id="24" name="Rect 0"/>
@@ -4864,247 +4803,489 @@
           </a:fontRef>
         </p:style>
       </p:cxnSp>
-      <p:cxnSp>
-        <p:nvCxnSpPr>
-          <p:cNvPr id="30" name="Rect 0"/>
-          <p:cNvCxnSpPr/>
+      <p:grpSp>
+        <p:nvGrpSpPr>
+          <p:cNvPr id="46" name="그룹 13"/>
+          <p:cNvGrpSpPr/>
           <p:nvPr/>
-        </p:nvCxnSpPr>
-        <p:spPr>
-          <a:xfrm>
-            <a:off x="7051675" y="5088255"/>
-            <a:ext cx="1164590" cy="635"/>
+        </p:nvGrpSpPr>
+        <p:grpSpPr>
+          <a:xfrm rot="0">
+            <a:off x="7042785" y="5659755"/>
+            <a:ext cx="1165225" cy="470535"/>
+            <a:chOff x="7042785" y="5659755"/>
+            <a:chExt cx="1165225" cy="470535"/>
           </a:xfrm>
-          <a:prstGeom prst="straightConnector1">
-            <a:avLst/>
-          </a:prstGeom>
-          <a:ln w="6350" cap="flat" cmpd="sng">
-            <a:prstDash/>
-            <a:tailEnd type="triangle" w="med" len="med"/>
-          </a:ln>
-        </p:spPr>
-        <p:style>
-          <a:lnRef idx="1">
-            <a:schemeClr val="accent1"/>
-          </a:lnRef>
-          <a:fillRef idx="0">
-            <a:schemeClr val="accent1"/>
-          </a:fillRef>
-          <a:effectRef idx="0">
-            <a:schemeClr val="accent1"/>
-          </a:effectRef>
-          <a:fontRef idx="minor">
-            <a:schemeClr val="tx1"/>
-          </a:fontRef>
-        </p:style>
-      </p:cxnSp>
-      <p:cxnSp>
-        <p:nvCxnSpPr>
-          <p:cNvPr id="31" name="Rect 0"/>
-          <p:cNvCxnSpPr/>
+        </p:grpSpPr>
+        <p:cxnSp>
+          <p:nvCxnSpPr>
+            <p:cNvPr id="30" name="Rect 0"/>
+            <p:cNvCxnSpPr/>
+            <p:nvPr/>
+          </p:nvCxnSpPr>
+          <p:spPr>
+            <a:xfrm rot="0">
+              <a:off x="7042785" y="5659755"/>
+              <a:ext cx="1165225" cy="1270"/>
+            </a:xfrm>
+            <a:prstGeom prst="straightConnector1"/>
+            <a:ln w="6350" cap="flat" cmpd="sng">
+              <a:prstDash/>
+              <a:tailEnd type="triangle" w="med" len="med"/>
+            </a:ln>
+          </p:spPr>
+          <p:style>
+            <a:lnRef idx="1">
+              <a:schemeClr val="accent1"/>
+            </a:lnRef>
+            <a:fillRef idx="0">
+              <a:schemeClr val="accent1"/>
+            </a:fillRef>
+            <a:effectRef idx="0">
+              <a:schemeClr val="accent1"/>
+            </a:effectRef>
+            <a:fontRef idx="minor">
+              <a:schemeClr val="tx1"/>
+            </a:fontRef>
+          </p:style>
+        </p:cxnSp>
+        <p:cxnSp>
+          <p:nvCxnSpPr>
+            <p:cNvPr id="31" name="Rect 0"/>
+            <p:cNvCxnSpPr/>
+            <p:nvPr/>
+          </p:nvCxnSpPr>
+          <p:spPr>
+            <a:xfrm rot="0">
+              <a:off x="7042785" y="6129020"/>
+              <a:ext cx="1165225" cy="1270"/>
+            </a:xfrm>
+            <a:prstGeom prst="straightConnector1"/>
+            <a:ln w="6350" cap="flat" cmpd="sng">
+              <a:prstDash/>
+              <a:headEnd type="triangle" w="med" len="med"/>
+            </a:ln>
+          </p:spPr>
+          <p:style>
+            <a:lnRef idx="1">
+              <a:schemeClr val="accent1"/>
+            </a:lnRef>
+            <a:fillRef idx="0">
+              <a:schemeClr val="accent1"/>
+            </a:fillRef>
+            <a:effectRef idx="0">
+              <a:schemeClr val="accent1"/>
+            </a:effectRef>
+            <a:fontRef idx="minor">
+              <a:schemeClr val="tx1"/>
+            </a:fontRef>
+          </p:style>
+        </p:cxnSp>
+      </p:grpSp>
+      <p:grpSp>
+        <p:nvGrpSpPr>
+          <p:cNvPr id="47" name="그룹 14"/>
+          <p:cNvGrpSpPr/>
           <p:nvPr/>
-        </p:nvCxnSpPr>
-        <p:spPr>
-          <a:xfrm>
-            <a:off x="7051675" y="5557520"/>
-            <a:ext cx="1164590" cy="635"/>
+        </p:nvGrpSpPr>
+        <p:grpSpPr>
+          <a:xfrm rot="0">
+            <a:off x="778510" y="4719320"/>
+            <a:ext cx="417195" cy="452120"/>
+            <a:chOff x="778510" y="4719320"/>
+            <a:chExt cx="417195" cy="452120"/>
           </a:xfrm>
-          <a:prstGeom prst="straightConnector1">
-            <a:avLst/>
-          </a:prstGeom>
-          <a:ln w="6350" cap="flat" cmpd="sng">
-            <a:prstDash/>
-            <a:headEnd type="triangle" w="med" len="med"/>
-          </a:ln>
-        </p:spPr>
-        <p:style>
-          <a:lnRef idx="1">
-            <a:schemeClr val="accent1"/>
-          </a:lnRef>
-          <a:fillRef idx="0">
-            <a:schemeClr val="accent1"/>
-          </a:fillRef>
-          <a:effectRef idx="0">
-            <a:schemeClr val="accent1"/>
-          </a:effectRef>
-          <a:fontRef idx="minor">
-            <a:schemeClr val="tx1"/>
-          </a:fontRef>
-        </p:style>
-      </p:cxnSp>
-      <p:sp>
-        <p:nvSpPr>
-          <p:cNvPr id="32" name="도형 1"/>
-          <p:cNvSpPr>
-            <a:spLocks/>
-          </p:cNvSpPr>
+        </p:grpSpPr>
+        <p:cxnSp>
+          <p:nvCxnSpPr>
+            <p:cNvPr id="33" name="도형 2"/>
+            <p:cNvCxnSpPr/>
+            <p:nvPr/>
+          </p:nvCxnSpPr>
+          <p:spPr>
+            <a:xfrm rot="0">
+              <a:off x="778510" y="4719320"/>
+              <a:ext cx="635" cy="452120"/>
+            </a:xfrm>
+            <a:prstGeom prst="straightConnector1"/>
+            <a:ln w="6350" cap="flat" cmpd="sng">
+              <a:prstDash/>
+              <a:tailEnd type="triangle" w="med" len="med"/>
+            </a:ln>
+          </p:spPr>
+          <p:style>
+            <a:lnRef idx="1">
+              <a:schemeClr val="accent1"/>
+            </a:lnRef>
+            <a:fillRef idx="0">
+              <a:schemeClr val="accent1"/>
+            </a:fillRef>
+            <a:effectRef idx="0">
+              <a:schemeClr val="accent1"/>
+            </a:effectRef>
+            <a:fontRef idx="minor">
+              <a:schemeClr val="tx1"/>
+            </a:fontRef>
+          </p:style>
+        </p:cxnSp>
+        <p:cxnSp>
+          <p:nvCxnSpPr>
+            <p:cNvPr id="34" name="도형 3"/>
+            <p:cNvCxnSpPr/>
+            <p:nvPr/>
+          </p:nvCxnSpPr>
+          <p:spPr>
+            <a:xfrm rot="0" flipH="1">
+              <a:off x="1194435" y="4719320"/>
+              <a:ext cx="1270" cy="451485"/>
+            </a:xfrm>
+            <a:prstGeom prst="straightConnector1"/>
+            <a:ln w="6350" cap="flat" cmpd="sng">
+              <a:prstDash/>
+              <a:headEnd type="triangle" w="med" len="med"/>
+            </a:ln>
+          </p:spPr>
+          <p:style>
+            <a:lnRef idx="1">
+              <a:schemeClr val="accent1"/>
+            </a:lnRef>
+            <a:fillRef idx="0">
+              <a:schemeClr val="accent1"/>
+            </a:fillRef>
+            <a:effectRef idx="0">
+              <a:schemeClr val="accent1"/>
+            </a:effectRef>
+            <a:fontRef idx="minor">
+              <a:schemeClr val="tx1"/>
+            </a:fontRef>
+          </p:style>
+        </p:cxnSp>
+      </p:grpSp>
+      <p:grpSp>
+        <p:nvGrpSpPr>
+          <p:cNvPr id="54" name="그룹 21"/>
+          <p:cNvGrpSpPr/>
           <p:nvPr/>
-        </p:nvSpPr>
-        <p:spPr>
-          <a:xfrm>
-            <a:off x="242570" y="4366260"/>
-            <a:ext cx="1541145" cy="1436370"/>
+        </p:nvGrpSpPr>
+        <p:grpSpPr>
+          <a:xfrm rot="0">
+            <a:off x="302895" y="3335020"/>
+            <a:ext cx="1428750" cy="1323340"/>
+            <a:chOff x="302895" y="3335020"/>
+            <a:chExt cx="1428750" cy="1323340"/>
           </a:xfrm>
-          <a:prstGeom prst="rect">
-            <a:avLst/>
-          </a:prstGeom>
-          <a:noFill/>
-        </p:spPr>
-        <p:style>
-          <a:lnRef idx="2">
-            <a:schemeClr val="accent1">
-              <a:shade val="50000"/>
-            </a:schemeClr>
-          </a:lnRef>
-          <a:fillRef idx="1">
-            <a:schemeClr val="accent1"/>
-          </a:fillRef>
-          <a:effectRef idx="0">
-            <a:schemeClr val="accent1"/>
-          </a:effectRef>
-          <a:fontRef idx="minor">
-            <a:schemeClr val="lt1"/>
-          </a:fontRef>
-        </p:style>
-        <p:txBody>
-          <a:bodyPr vert="horz" wrap="square" lIns="91440" tIns="45720" rIns="91440" bIns="45720" numCol="1" anchor="ctr">
-            <a:noAutofit/>
-          </a:bodyPr>
-          <a:lstStyle/>
-          <a:p>
-            <a:pPr marL="0" indent="0" algn="ctr" latinLnBrk="0">
-              <a:buFontTx/>
-              <a:buNone/>
-            </a:pPr>
-            <a:endParaRPr lang="ko-KR" altLang="en-US"/>
-          </a:p>
-        </p:txBody>
-      </p:sp>
-      <p:cxnSp>
-        <p:nvCxnSpPr>
-          <p:cNvPr id="33" name="도형 2"/>
-          <p:cNvCxnSpPr/>
+        </p:grpSpPr>
+        <p:sp>
+          <p:nvSpPr>
+            <p:cNvPr id="32" name="도형 1"/>
+            <p:cNvSpPr>
+              <a:spLocks/>
+            </p:cNvSpPr>
+            <p:nvPr/>
+          </p:nvSpPr>
+          <p:spPr>
+            <a:xfrm rot="0">
+              <a:off x="302895" y="3335020"/>
+              <a:ext cx="1428750" cy="1323340"/>
+            </a:xfrm>
+            <a:prstGeom prst="rect"/>
+            <a:noFill/>
+          </p:spPr>
+          <p:style>
+            <a:lnRef idx="2">
+              <a:schemeClr val="accent1">
+                <a:shade val="50000"/>
+              </a:schemeClr>
+            </a:lnRef>
+            <a:fillRef idx="1">
+              <a:schemeClr val="accent1"/>
+            </a:fillRef>
+            <a:effectRef idx="0">
+              <a:schemeClr val="accent1"/>
+            </a:effectRef>
+            <a:fontRef idx="minor">
+              <a:schemeClr val="lt1"/>
+            </a:fontRef>
+          </p:style>
+          <p:txBody>
+            <a:bodyPr wrap="square" lIns="91440" tIns="45720" rIns="91440" bIns="45720" numCol="1" vert="horz" anchor="ctr">
+              <a:noAutofit/>
+            </a:bodyPr>
+            <a:lstStyle/>
+            <a:p>
+              <a:pPr marL="0" indent="0" algn="ctr" latinLnBrk="0">
+                <a:buFontTx/>
+                <a:buNone/>
+              </a:pPr>
+              <a:endParaRPr lang="ko-KR" altLang="en-US"/>
+            </a:p>
+          </p:txBody>
+        </p:sp>
+        <p:sp>
+          <p:nvSpPr>
+            <p:cNvPr id="37" name="텍스트 상자 6"/>
+            <p:cNvSpPr txBox="1">
+              <a:spLocks/>
+            </p:cNvSpPr>
+            <p:nvPr/>
+          </p:nvSpPr>
+          <p:spPr>
+            <a:xfrm rot="0">
+              <a:off x="355600" y="3358515"/>
+              <a:ext cx="1319530" cy="594360"/>
+            </a:xfrm>
+            <a:prstGeom prst="rect"/>
+            <a:noFill/>
+          </p:spPr>
+          <p:txBody>
+            <a:bodyPr wrap="none" lIns="91440" tIns="45720" rIns="91440" bIns="45720" numCol="1" vert="horz" anchor="t">
+              <a:spAutoFit/>
+            </a:bodyPr>
+            <a:lstStyle/>
+            <a:p>
+              <a:pPr marL="0" indent="0" latinLnBrk="0">
+                <a:buFontTx/>
+                <a:buNone/>
+              </a:pPr>
+              <a:r>
+                <a:rPr lang="ko-KR" altLang="ko-KR"/>
+                <a:t>Geolocation</a:t>
+              </a:r>
+              <a:endParaRPr lang="ko-KR" altLang="en-US"/>
+            </a:p>
+            <a:p>
+              <a:pPr marL="0" indent="0" latinLnBrk="0">
+                <a:buFontTx/>
+                <a:buNone/>
+              </a:pPr>
+              <a:r>
+                <a:rPr lang="ko-KR" altLang="ko-KR"/>
+                <a:t>      </a:t>
+              </a:r>
+              <a:r>
+                <a:rPr lang="ko-KR" altLang="ko-KR"/>
+                <a:t>API</a:t>
+              </a:r>
+              <a:endParaRPr lang="ko-KR" altLang="en-US"/>
+            </a:p>
+          </p:txBody>
+        </p:sp>
+      </p:grpSp>
+      <p:grpSp>
+        <p:nvGrpSpPr>
+          <p:cNvPr id="42" name="그룹 9"/>
+          <p:cNvGrpSpPr/>
           <p:nvPr/>
-        </p:nvCxnSpPr>
-        <p:spPr>
-          <a:xfrm>
-            <a:off x="751205" y="3957320"/>
-            <a:ext cx="635" cy="399415"/>
+        </p:nvGrpSpPr>
+        <p:grpSpPr>
+          <a:xfrm rot="0">
+            <a:off x="236220" y="5173345"/>
+            <a:ext cx="1541780" cy="1437005"/>
+            <a:chOff x="236220" y="5173345"/>
+            <a:chExt cx="1541780" cy="1437005"/>
           </a:xfrm>
-          <a:prstGeom prst="straightConnector1">
-            <a:avLst/>
-          </a:prstGeom>
-          <a:ln w="6350" cap="flat" cmpd="sng">
-            <a:prstDash/>
-            <a:tailEnd type="triangle" w="med" len="med"/>
-          </a:ln>
-        </p:spPr>
-        <p:style>
-          <a:lnRef idx="1">
-            <a:schemeClr val="accent1"/>
-          </a:lnRef>
-          <a:fillRef idx="0">
-            <a:schemeClr val="accent1"/>
-          </a:fillRef>
-          <a:effectRef idx="0">
-            <a:schemeClr val="accent1"/>
-          </a:effectRef>
-          <a:fontRef idx="minor">
-            <a:schemeClr val="tx1"/>
-          </a:fontRef>
-        </p:style>
-      </p:cxnSp>
-      <p:cxnSp>
-        <p:nvCxnSpPr>
-          <p:cNvPr id="34" name="도형 3"/>
-          <p:cNvCxnSpPr/>
+        </p:grpSpPr>
+        <p:sp>
+          <p:nvSpPr>
+            <p:cNvPr id="38" name="도형 1"/>
+            <p:cNvSpPr>
+              <a:spLocks/>
+            </p:cNvSpPr>
+            <p:nvPr/>
+          </p:nvSpPr>
+          <p:spPr>
+            <a:xfrm rot="0">
+              <a:off x="236220" y="5173345"/>
+              <a:ext cx="1541780" cy="1437005"/>
+            </a:xfrm>
+            <a:prstGeom prst="rect"/>
+            <a:noFill/>
+          </p:spPr>
+          <p:style>
+            <a:lnRef idx="2">
+              <a:schemeClr val="accent1">
+                <a:shade val="50000"/>
+              </a:schemeClr>
+            </a:lnRef>
+            <a:fillRef idx="1">
+              <a:schemeClr val="accent1"/>
+            </a:fillRef>
+            <a:effectRef idx="0">
+              <a:schemeClr val="accent1"/>
+            </a:effectRef>
+            <a:fontRef idx="minor">
+              <a:schemeClr val="lt1"/>
+            </a:fontRef>
+          </p:style>
+          <p:txBody>
+            <a:bodyPr wrap="square" lIns="91440" tIns="45720" rIns="91440" bIns="45720" numCol="1" vert="horz" anchor="ctr">
+              <a:noAutofit/>
+            </a:bodyPr>
+            <a:lstStyle/>
+            <a:p>
+              <a:pPr marL="0" indent="0" algn="ctr" latinLnBrk="0">
+                <a:buFontTx/>
+                <a:buNone/>
+              </a:pPr>
+              <a:endParaRPr lang="ko-KR" altLang="en-US"/>
+            </a:p>
+          </p:txBody>
+        </p:sp>
+        <p:sp>
+          <p:nvSpPr>
+            <p:cNvPr id="39" name="텍스트 상자 2"/>
+            <p:cNvSpPr txBox="1">
+              <a:spLocks/>
+            </p:cNvSpPr>
+            <p:nvPr/>
+          </p:nvSpPr>
+          <p:spPr>
+            <a:xfrm rot="0">
+              <a:off x="379095" y="5233035"/>
+              <a:ext cx="1229995" cy="368935"/>
+            </a:xfrm>
+            <a:prstGeom prst="rect"/>
+            <a:noFill/>
+          </p:spPr>
+          <p:txBody>
+            <a:bodyPr wrap="none" lIns="91440" tIns="45720" rIns="91440" bIns="45720" numCol="1" vert="horz" anchor="t">
+              <a:spAutoFit/>
+            </a:bodyPr>
+            <a:lstStyle/>
+            <a:p>
+              <a:pPr marL="0" indent="0" latinLnBrk="0">
+                <a:buFontTx/>
+                <a:buNone/>
+              </a:pPr>
+              <a:r>
+                <a:rPr lang="ko-KR" altLang="ko-KR"/>
+                <a:t>Kakao API</a:t>
+              </a:r>
+              <a:endParaRPr lang="ko-KR" altLang="en-US"/>
+            </a:p>
+          </p:txBody>
+        </p:sp>
+      </p:grpSp>
+      <p:grpSp>
+        <p:nvGrpSpPr>
+          <p:cNvPr id="51" name="그룹 20"/>
+          <p:cNvGrpSpPr/>
           <p:nvPr/>
-        </p:nvCxnSpPr>
-        <p:spPr>
-          <a:xfrm>
-            <a:off x="1167765" y="3940175"/>
-            <a:ext cx="635" cy="415925"/>
+        </p:nvGrpSpPr>
+        <p:grpSpPr>
+          <a:xfrm rot="0">
+            <a:off x="2501265" y="1451610"/>
+            <a:ext cx="1291590" cy="2989580"/>
+            <a:chOff x="2501265" y="1451610"/>
+            <a:chExt cx="1291590" cy="2989580"/>
           </a:xfrm>
-          <a:prstGeom prst="straightConnector1">
-            <a:avLst/>
-          </a:prstGeom>
-          <a:ln w="6350" cap="flat" cmpd="sng">
-            <a:prstDash/>
-            <a:headEnd type="triangle" w="med" len="med"/>
-          </a:ln>
-        </p:spPr>
-        <p:style>
-          <a:lnRef idx="1">
-            <a:schemeClr val="accent1"/>
-          </a:lnRef>
-          <a:fillRef idx="0">
-            <a:schemeClr val="accent1"/>
-          </a:fillRef>
-          <a:effectRef idx="0">
-            <a:schemeClr val="accent1"/>
-          </a:effectRef>
-          <a:fontRef idx="minor">
-            <a:schemeClr val="tx1"/>
-          </a:fontRef>
-        </p:style>
-      </p:cxnSp>
-      <p:sp>
-        <p:nvSpPr>
-          <p:cNvPr id="37" name="텍스트 상자 6"/>
-          <p:cNvSpPr txBox="1">
-            <a:spLocks/>
-          </p:cNvSpPr>
-          <p:nvPr/>
-        </p:nvSpPr>
-        <p:spPr>
-          <a:xfrm>
-            <a:off x="299085" y="4348480"/>
-            <a:ext cx="1424305" cy="645795"/>
-          </a:xfrm>
-          <a:prstGeom prst="rect">
-            <a:avLst/>
-          </a:prstGeom>
-          <a:noFill/>
-        </p:spPr>
-        <p:txBody>
-          <a:bodyPr vert="horz" wrap="none" lIns="91440" tIns="45720" rIns="91440" bIns="45720" numCol="1" anchor="t">
-            <a:spAutoFit/>
-          </a:bodyPr>
-          <a:lstStyle/>
-          <a:p>
-            <a:pPr marL="0" indent="0" latinLnBrk="0">
-              <a:buFontTx/>
-              <a:buNone/>
-            </a:pPr>
-            <a:r>
-              <a:rPr lang="ko-KR" altLang="ko-KR"/>
-              <a:t>Geolocation</a:t>
-            </a:r>
-            <a:endParaRPr lang="ko-KR" altLang="en-US"/>
-          </a:p>
-          <a:p>
-            <a:pPr marL="0" indent="0" latinLnBrk="0">
-              <a:buFontTx/>
-              <a:buNone/>
-            </a:pPr>
-            <a:r>
-              <a:rPr lang="ko-KR" altLang="ko-KR"/>
-              <a:t>      api</a:t>
-            </a:r>
-            <a:endParaRPr lang="ko-KR" altLang="en-US"/>
-          </a:p>
-        </p:txBody>
-      </p:sp>
+        </p:grpSpPr>
+        <p:sp>
+          <p:nvSpPr>
+            <p:cNvPr id="52" name="도형 18"/>
+            <p:cNvSpPr>
+              <a:spLocks/>
+            </p:cNvSpPr>
+            <p:nvPr/>
+          </p:nvSpPr>
+          <p:spPr>
+            <a:xfrm rot="0">
+              <a:off x="2505075" y="1451610"/>
+              <a:ext cx="1287780" cy="2989580"/>
+            </a:xfrm>
+            <a:prstGeom prst="rect"/>
+            <a:noFill/>
+          </p:spPr>
+          <p:style>
+            <a:lnRef idx="2">
+              <a:schemeClr val="accent1">
+                <a:shade val="50000"/>
+              </a:schemeClr>
+            </a:lnRef>
+            <a:fillRef idx="1">
+              <a:schemeClr val="accent1"/>
+            </a:fillRef>
+            <a:effectRef idx="0">
+              <a:schemeClr val="accent1"/>
+            </a:effectRef>
+            <a:fontRef idx="minor">
+              <a:schemeClr val="lt1"/>
+            </a:fontRef>
+          </p:style>
+          <p:txBody>
+            <a:bodyPr wrap="square" lIns="91440" tIns="45720" rIns="91440" bIns="45720" numCol="1" vert="horz" anchor="ctr">
+              <a:noAutofit/>
+            </a:bodyPr>
+            <a:lstStyle/>
+            <a:p>
+              <a:pPr marL="0" indent="0" algn="ctr" latinLnBrk="0">
+                <a:buFontTx/>
+                <a:buNone/>
+              </a:pPr>
+              <a:endParaRPr lang="ko-KR" altLang="en-US"/>
+            </a:p>
+          </p:txBody>
+        </p:sp>
+        <p:sp>
+          <p:nvSpPr>
+            <p:cNvPr id="53" name="텍스트 상자 19"/>
+            <p:cNvSpPr txBox="1">
+              <a:spLocks/>
+            </p:cNvSpPr>
+            <p:nvPr/>
+          </p:nvSpPr>
+          <p:spPr>
+            <a:xfrm rot="0">
+              <a:off x="2501265" y="1452880"/>
+              <a:ext cx="1289050" cy="368935"/>
+            </a:xfrm>
+            <a:prstGeom prst="rect"/>
+            <a:noFill/>
+          </p:spPr>
+          <p:txBody>
+            <a:bodyPr wrap="square" lIns="91440" tIns="45720" rIns="91440" bIns="45720" numCol="1" vert="horz" anchor="t">
+              <a:spAutoFit/>
+            </a:bodyPr>
+            <a:lstStyle/>
+            <a:p>
+              <a:pPr marL="0" indent="0" algn="ctr" latinLnBrk="0">
+                <a:buFontTx/>
+                <a:buNone/>
+              </a:pPr>
+              <a:r>
+                <a:rPr lang="ko-KR" altLang="ko-KR"/>
+                <a:t>Web/API</a:t>
+              </a:r>
+              <a:endParaRPr lang="ko-KR" altLang="en-US"/>
+            </a:p>
+          </p:txBody>
+        </p:sp>
+      </p:grpSp>
     </p:spTree>
   </p:cSld>
   <p:clrMapOvr>
     <a:masterClrMapping/>
   </p:clrMapOvr>
+  <mc:AlternateContent xmlns:mc="http://schemas.openxmlformats.org/markup-compatibility/2006">
+    <mc:Choice xmlns:p14="http://schemas.microsoft.com/office/powerpoint/2010/main" Requires="p14">
+      <p:transition spd="slow" p14:dur="2000"/>
+    </mc:Choice>
+    <mc:Fallback>
+      <p:transition spd="slow"/>
+    </mc:Fallback>
+  </mc:AlternateContent>
+  <p:timing>
+    <p:tnLst>
+      <p:par>
+        <p:cTn id="1" dur="indefinite" restart="never" nodeType="tmRoot"/>
+      </p:par>
+    </p:tnLst>
+  </p:timing>
 </p:sld>
 </file>
 
 <file path=ppt/slides/slide4.xml><?xml version="1.0" encoding="utf-8"?>
-<p:sld xmlns:a="http://schemas.openxmlformats.org/drawingml/2006/main" xmlns:r="http://schemas.openxmlformats.org/officeDocument/2006/relationships" xmlns:p="http://schemas.openxmlformats.org/presentationml/2006/main">
+<p:sld xmlns:a="http://schemas.openxmlformats.org/drawingml/2006/main" xmlns:r="http://schemas.openxmlformats.org/officeDocument/2006/relationships" xmlns:p="http://schemas.openxmlformats.org/presentationml/2006/main" xmlns:p14="http://schemas.microsoft.com/office/powerpoint/2010/main">
   <p:cSld>
     <p:spTree>
       <p:nvGrpSpPr>
@@ -5120,94 +5301,121 @@
           <a:chExt cx="0" cy="0"/>
         </a:xfrm>
       </p:grpSpPr>
-      <p:sp>
-        <p:nvSpPr>
-          <p:cNvPr id="4" name="Rect 0"/>
-          <p:cNvSpPr>
-            <a:spLocks/>
-          </p:cNvSpPr>
+      <p:grpSp>
+        <p:nvGrpSpPr>
+          <p:cNvPr id="6" name="그룹 7"/>
+          <p:cNvGrpSpPr/>
           <p:nvPr/>
-        </p:nvSpPr>
-        <p:spPr>
-          <a:xfrm>
-            <a:off x="2341245" y="471170"/>
-            <a:ext cx="4697095" cy="5334635"/>
+        </p:nvGrpSpPr>
+        <p:grpSpPr>
+          <a:xfrm rot="0">
+            <a:off x="2757170" y="687705"/>
+            <a:ext cx="4697730" cy="5335270"/>
+            <a:chOff x="2757170" y="687705"/>
+            <a:chExt cx="4697730" cy="5335270"/>
           </a:xfrm>
-          <a:prstGeom prst="rect">
-            <a:avLst/>
-          </a:prstGeom>
-          <a:noFill/>
-        </p:spPr>
-        <p:style>
-          <a:lnRef idx="2">
-            <a:schemeClr val="accent1">
-              <a:shade val="50000"/>
-            </a:schemeClr>
-          </a:lnRef>
-          <a:fillRef idx="1">
-            <a:schemeClr val="accent1"/>
-          </a:fillRef>
-          <a:effectRef idx="0">
-            <a:schemeClr val="accent1"/>
-          </a:effectRef>
-          <a:fontRef idx="minor">
-            <a:schemeClr val="lt1"/>
-          </a:fontRef>
-        </p:style>
-        <p:txBody>
-          <a:bodyPr vert="horz" wrap="square" lIns="91440" tIns="45720" rIns="91440" bIns="45720" numCol="1" anchor="ctr">
-            <a:noAutofit/>
-          </a:bodyPr>
-          <a:lstStyle/>
-          <a:p>
-            <a:pPr marL="0" indent="0" algn="ctr" latinLnBrk="0">
-              <a:buFontTx/>
-              <a:buNone/>
-            </a:pPr>
-            <a:endParaRPr lang="ko-KR" altLang="en-US"/>
-          </a:p>
-        </p:txBody>
-      </p:sp>
-      <p:sp>
-        <p:nvSpPr>
-          <p:cNvPr id="5" name="Rect 0"/>
-          <p:cNvSpPr txBox="1">
-            <a:spLocks/>
-          </p:cNvSpPr>
-          <p:nvPr/>
-        </p:nvSpPr>
-        <p:spPr>
-          <a:xfrm>
-            <a:off x="4071620" y="683895"/>
-            <a:ext cx="1108710" cy="370205"/>
-          </a:xfrm>
-          <a:prstGeom prst="rect">
-            <a:avLst/>
-          </a:prstGeom>
-          <a:noFill/>
-        </p:spPr>
-        <p:txBody>
-          <a:bodyPr vert="horz" wrap="none" lIns="91440" tIns="45720" rIns="91440" bIns="45720" numCol="1" anchor="t">
-            <a:spAutoFit/>
-          </a:bodyPr>
-          <a:lstStyle/>
-          <a:p>
-            <a:pPr marL="0" indent="0" latinLnBrk="0">
-              <a:buFontTx/>
-              <a:buNone/>
-            </a:pPr>
-            <a:r>
-              <a:rPr lang="ko-KR" altLang="en-US"/>
-              <a:t>추천엔진</a:t>
-            </a:r>
-          </a:p>
-        </p:txBody>
-      </p:sp>
+        </p:grpSpPr>
+        <p:sp>
+          <p:nvSpPr>
+            <p:cNvPr id="4" name="Rect 0"/>
+            <p:cNvSpPr>
+              <a:spLocks/>
+            </p:cNvSpPr>
+            <p:nvPr/>
+          </p:nvSpPr>
+          <p:spPr>
+            <a:xfrm rot="0">
+              <a:off x="2757170" y="687705"/>
+              <a:ext cx="4697730" cy="5335270"/>
+            </a:xfrm>
+            <a:prstGeom prst="rect"/>
+            <a:noFill/>
+          </p:spPr>
+          <p:style>
+            <a:lnRef idx="2">
+              <a:schemeClr val="accent1">
+                <a:shade val="50000"/>
+              </a:schemeClr>
+            </a:lnRef>
+            <a:fillRef idx="1">
+              <a:schemeClr val="accent1"/>
+            </a:fillRef>
+            <a:effectRef idx="0">
+              <a:schemeClr val="accent1"/>
+            </a:effectRef>
+            <a:fontRef idx="minor">
+              <a:schemeClr val="lt1"/>
+            </a:fontRef>
+          </p:style>
+          <p:txBody>
+            <a:bodyPr wrap="square" lIns="91440" tIns="45720" rIns="91440" bIns="45720" numCol="1" vert="horz" anchor="ctr">
+              <a:noAutofit/>
+            </a:bodyPr>
+            <a:lstStyle/>
+            <a:p>
+              <a:pPr marL="0" indent="0" algn="ctr" latinLnBrk="0">
+                <a:buFontTx/>
+                <a:buNone/>
+              </a:pPr>
+              <a:endParaRPr lang="ko-KR" altLang="en-US"/>
+            </a:p>
+          </p:txBody>
+        </p:sp>
+        <p:sp>
+          <p:nvSpPr>
+            <p:cNvPr id="5" name="Rect 0"/>
+            <p:cNvSpPr txBox="1">
+              <a:spLocks/>
+            </p:cNvSpPr>
+            <p:nvPr/>
+          </p:nvSpPr>
+          <p:spPr>
+            <a:xfrm rot="0">
+              <a:off x="4547870" y="814070"/>
+              <a:ext cx="1109345" cy="370840"/>
+            </a:xfrm>
+            <a:prstGeom prst="rect"/>
+            <a:noFill/>
+          </p:spPr>
+          <p:txBody>
+            <a:bodyPr wrap="none" lIns="91440" tIns="45720" rIns="91440" bIns="45720" numCol="1" vert="horz" anchor="t">
+              <a:spAutoFit/>
+            </a:bodyPr>
+            <a:lstStyle/>
+            <a:p>
+              <a:pPr marL="0" indent="0" latinLnBrk="0">
+                <a:buFontTx/>
+                <a:buNone/>
+              </a:pPr>
+              <a:r>
+                <a:rPr lang="ko-KR" altLang="en-US"/>
+                <a:t>추천엔진</a:t>
+              </a:r>
+              <a:endParaRPr lang="ko-KR" altLang="en-US"/>
+            </a:p>
+          </p:txBody>
+        </p:sp>
+      </p:grpSp>
     </p:spTree>
   </p:cSld>
   <p:clrMapOvr>
     <a:masterClrMapping/>
   </p:clrMapOvr>
+  <mc:AlternateContent xmlns:mc="http://schemas.openxmlformats.org/markup-compatibility/2006">
+    <mc:Choice xmlns:p14="http://schemas.microsoft.com/office/powerpoint/2010/main" Requires="p14">
+      <p:transition spd="slow" p14:dur="2000"/>
+    </mc:Choice>
+    <mc:Fallback>
+      <p:transition spd="slow"/>
+    </mc:Fallback>
+  </mc:AlternateContent>
+  <p:timing>
+    <p:tnLst>
+      <p:par>
+        <p:cTn id="1" dur="indefinite" restart="never" nodeType="tmRoot"/>
+      </p:par>
+    </p:tnLst>
+  </p:timing>
 </p:sld>
 </file>
 
